--- a/docs/walkthrough/meridian-sentinel-walkthrough.pptx
+++ b/docs/walkthrough/meridian-sentinel-walkthrough.pptx
@@ -516,7 +516,7 @@
           <a:lstStyle/>
           <a:p>
             <a:r>
-              <a:t>Open with a clean 15-second framing. I built Meridian Sentinel as my take-home — a counterparty intelligence platform for commodities firms. Today I want to walk you through three things: who the customer is and why this use case maps to Sayari's product, what I actually built, and the architectural decisions I'd defend to a customer. Then we'll go to a live demo running on localhost. Throughout, the file references on each slide point to real code in the repo — every path and line range resolves. You'll get the deck and a one-page leave-behind afterward, so you don't need to take notes. The whole thing runs with one command — docker compose up — and the cached demo path needs zero credentials, so anyone on your team can clone it and reproduce exactly what you'll see today.</a:t>
+              <a:t>Open with a clean 15-second framing. I built Meridian Sentinel as my take-home — a counterparty intelligence platform for commodities firms. Today I want to walk you through three things: who the customer is and why this use case maps to Sayari's product, what I actually built, and the architectural decisions I'd defend to a customer. Then we'll go to a live demo running on localhost. Every file reference in this deck is a clickable link to the exact code in the repo. You'll get the deck and a one-page leave-behind afterward, so you don't need to take notes. The whole thing runs with one command — docker compose up — and the cached demo path needs zero credentials, so anyone on your team can clone it and reproduce exactly what you'll see today.</a:t>
             </a:r>
           </a:p>
         </p:txBody>
@@ -586,7 +586,7 @@
           <a:lstStyle/>
           <a:p>
             <a:r>
-              <a:t>This slide is for Alec especially, who made the same career jump I'm making. I want to be transparent about how I built this. Three layers. First, Claude as a thinking partner — architecture, scope, ADR drafting, and honestly pushing back when I was over-scoping. Second, Claude Code as the execution engine — it took locked-scope prompts and shipped them as focused commits, citing file and line in each change, and crucially it ran the app and curl-verified each change in the same session. It caught its own regressions: a React hooks-order bug that silently blanked a component, a blank-row miscount in the spreadsheet parser, a d3 coordinate-transform bug in the graph. Third, me as the verification and judgment layer — I walked the running app after every change, made the product calls, and pushed back on scope creep. What I learned is that AI output is only as good as the verification gate above it. The discipline isn't 'use AI to go faster' — it's 'design the gates so AI output earns trust.' And if you scale a team this way, you're not replacing engineers, you're moving them to the judgment layer. I think that's the FDE pattern at scale, and it's exactly the kind of leverage I'd want to bring to your customers.</a:t>
+              <a:t>This slide is for Alec especially, who made the same career jump I'm making. Three layers. Claude as a thinking partner — architecture, scope, ADR drafting, and pushing back when I over-scoped. Claude Code as the execution engine — locked-scope prompts shipped as focused commits, file-and-line cited in each, and it ran the app and curl-verified each change in-session. It caught its own regressions: a React hooks-order bug that silently blanked a component, a blank-row miscount in the parser, a d3 coordinate bug in the graph. And me as the verification and judgment layer — I walked the running app after every change and made the product calls. What I learned is that AI output is only as good as the verification gate above it. The discipline isn't 'use AI to go faster' — it's 'design the gates so AI output earns trust.' Scale a team this way and you move engineers up to the judgment layer. That's the FDE pattern at scale.</a:t>
             </a:r>
           </a:p>
         </p:txBody>
@@ -656,7 +656,7 @@
           <a:lstStyle/>
           <a:p>
             <a:r>
-              <a:t>If anyone wants the full stack, here it is, four columns. Two things worth flagging. First, the frontend is React rendered by Babel-standalone in the browser with no build step — every JSX file is readable as text and runs as-is, which I'll defend as a deliberate take-home choice on the next slide-set. The design tokens live as CSS variables, not a framework config. Second, the data layer defaults to file-based caching for inspectability, with an optional six-table Postgres path that the code falls back from gracefully. The OFAC feed is seventeen thousand rows held in memory for microsecond matching, and PDF briefings use WeasyPrint with an HTML fallback when the system graphics libraries aren't present.</a:t>
+              <a:t>The full stack, four columns. Two things worth flagging. First, the frontend is React rendered by Babel-standalone in the browser with no build step — every JSX file is readable as text and runs as-is. The design tokens live as CSS variables, not a framework config. Second, the data layer defaults to file-based caching for inspectability, with an optional six-table Postgres path the code falls back from. The OFAC feed is seventeen thousand rows in memory, and PDF briefings use WeasyPrint with an HTML fallback.</a:t>
             </a:r>
           </a:p>
         </p:txBody>
@@ -726,7 +726,7 @@
           <a:lstStyle/>
           <a:p>
             <a:r>
-              <a:t>The data model is deliberately file-first. The optional Postgres schema on the left has six tables — OFAC data, entity cache, screening runs, investigations, per-entity results, and analyst dispositions — and pg_trgm for fuzzy matching. But the actual default, on the right, is the file cache under output slash. A hundred cached entity profiles, sixty-six ownership graphs, the pinned demo run, and four captured co-pilot streams — all real Sayari responses, committed to the repo so the demo reproduces on any clone with zero credentials. For a proof of concept I'd argue file-first is the right call: every artifact is inspectable with cat or grep, which matters enormously when your whole pitch is 'trace every finding to its source.' Postgres is the production move, and the code already falls back to it cleanly.</a:t>
+              <a:t>The data model is file-first. The optional Postgres schema on the left has six tables — OFAC data, entity cache, screening runs, investigations, per-entity results, and dispositions — with pg_trgm fuzzy matching. But the actual default, on the right, is the file cache under output: a hundred cached entity profiles, sixty-six ownership graphs, the pinned demo run, and four captured co-pilot streams — all real Sayari responses, committed so the demo reproduces on any clone with zero credentials. For a proof of concept, file-first is the right call: every artifact is inspectable with cat or grep, which matters when your whole pitch is 'trace every finding to its source.'</a:t>
             </a:r>
           </a:p>
         </p:txBody>
@@ -796,7 +796,7 @@
           <a:lstStyle/>
           <a:p>
             <a:r>
-              <a:t>Security is a place I'd expect probing. Credentials are the cleanest story: they live in an in-memory store that is never written to disk or to the browser, cleared on restart, and the store takes priority over environment variables so an in-app entry overrides .env without a restart. Secrets: .env is gitignored, and I ran a full git-history scan to confirm no credential was ever committed — the only matches are placeholder text in docs. The deepest security property is data provenance: every value cites its cache file, and the agent's only data source is the typed tools, so it's structurally incapable of fabricating a number. The honest gaps: real identity-provider integration — the login is a demo gate today — explicit prompt-injection guards, and per-route rate limiting and audit logging. Those are the production-hardening pass.</a:t>
+              <a:t>Security, where I'd expect probing. Credentials live in an in-memory store, never written to disk or browser, cleared on restart, and the store takes priority over environment variables so an in-app entry overrides .env without a restart. Secrets: .env is gitignored, and I ran a full git-history scan to confirm no credential was ever committed. The deepest property is data provenance: every value cites its cache file, and the agent's only data source is the typed tools, so it's structurally incapable of fabricating. The honest gaps: real identity-provider integration, explicit prompt-injection guards, and per-route rate limiting and audit logging.</a:t>
             </a:r>
           </a:p>
         </p:txBody>
@@ -866,7 +866,7 @@
           <a:lstStyle/>
           <a:p>
             <a:r>
-              <a:t>If you want to dig into the code after the meeting, these are the files I'd start with. On the frontend: the index.html that loads everything via Babel-standalone, the hash router, and the four surfaces — Compare, Entity, the upload trace, and the co-pilot. On the backend: the FastAPI main, the profile extractor that's the single source of truth for risk factors, the resolver with the pinned IDs, the compare reconciliation, the cache-first traversal, the briefing generator, the agent loop, and the MCP server. Every path on this slide resolves at the GitHub URL shown at the bottom.</a:t>
+              <a:t>If you want to dig into the code, these are the files I'd start with — and every file name on this slide is a clickable link straight to it on GitHub. On the frontend: the index.html Babel loader, the hash router, and the four surfaces. On the backend: the FastAPI main, the profile extractor, the resolver with the pinned IDs, the compare reconciliation, the cache-first traversal, the briefing generator, the agent loop, and the MCP server.</a:t>
             </a:r>
           </a:p>
         </p:txBody>
@@ -936,7 +936,7 @@
           <a:lstStyle/>
           <a:p>
             <a:r>
-              <a:t>Thank you for the time. The full deck, the ADRs, and the one-page leave-behind are all in the repo under docs/walkthrough. The whole thing runs with one command — clone and docker compose up — so anyone on your team can reproduce exactly what you saw today. I'd love to do a deeper session: architecture, a code walkthrough, or a whiteboard on a scaling problem — whatever's most useful. Looking forward to the next conversation.</a:t>
+              <a:t>Thank you for the time. The full deck, the ADRs, and the one-page leave-behind are all in the repo under docs/walkthrough — the links here are clickable. The whole thing runs with one command, so anyone on your team can reproduce what you saw today. I'd love a deeper session: architecture, a code walkthrough, or a whiteboard on a scaling problem. Looking forward to the next conversation.</a:t>
             </a:r>
           </a:p>
         </p:txBody>
@@ -1006,7 +1006,7 @@
           <a:lstStyle/>
           <a:p>
             <a:r>
-              <a:t>Before architecture, the customer. Meridian Energy Trading is a Geneva-based commodities firm — I made them up, but their pain is real and well-documented from FINMA's 2025 enforcement actions. They trade crude, LNG, refined products, base metals, and they onboard over 2,000 counterparties. Their problem is that traditional OFAC name-match produces too many false positives and misses ownership-layered exposure — a vendor isn't sanctioned, but their ultimate beneficial owner three hops up is. Manual beneficial-owner research takes their analysts four to six hours per entity, and FINMA has started enforcing against firms that miss this. This is exactly the problem Sayari's commercial world model solves. I built the application layer that turns Sayari's graph into actual compliance-officer decisions. That's the FDE pattern Hunter described: customer-grounded application development that feeds the product flywheel. I wanted to demonstrate I understand the business you're in, not just that I can write code.</a:t>
+              <a:t>Before architecture, the customer. Meridian Energy Trading is a Geneva-based commodities firm — I made them up, but the pain is real, and it reflects the way FINMA has been tightening its stance on beneficial-ownership screening. They trade crude, LNG, refined products, base metals, and onboard over 2,000 counterparties. Their problem is that traditional OFAC name-match produces too many false positives and misses ownership-layered exposure — a vendor isn't sanctioned, but their ultimate beneficial owner three hops up is. Manual beneficial-owner research takes their analysts four to six hours per entity. This is exactly the problem Sayari's commercial world model solves. I built the application layer that turns Sayari's graph into actual compliance-officer decisions. That's the FDE pattern Hunter described: customer-grounded application development that feeds the product flywheel. I wanted to demonstrate I understand the business you're in, not just that I can write code.</a:t>
             </a:r>
           </a:p>
         </p:txBody>
@@ -1076,7 +1076,7 @@
           <a:lstStyle/>
           <a:p>
             <a:r>
-              <a:t>What I built, in eight days, is a counterparty intelligence platform with three pillars. First, a deterministic engine — a compliance officer uploads a vendor list, the engine resolves each name to a Sayari entity, traverses ownership, screens OFAC, and produces an audit-defensible briefing. The key architectural commitment is that no LLM touches the numbers — every value traces to a Sayari field in a cached JSON file on disk. Second, a grounded co-pilot — a Claude tool-use loop over those same typed tools, streamed token-by-token, that cites every claim and is forbidden by its system prompt from fabricating. Cached mode replays four real captured runs, so the full co-pilot demonstration costs zero API spend. Third, MCP-exposed tools — the same six capabilities are available to Claude Desktop or any MCP client by direct engine import. That's the platform point: the same engine serves a human in a browser and an agent over a protocol. I treated this take-home like a real FDE engagement: customer discovery first, then platform thinking, then build. Even with an eight-day deadline, the design assumes someone deploys this to a real customer in eight weeks.</a:t>
+              <a:t>What I built is a counterparty intelligence platform with three pillars. First, a deterministic engine — a compliance officer uploads a vendor list, the engine resolves each name to a Sayari entity, traverses ownership, screens OFAC, and produces an audit-defensible briefing. The key commitment is that no LLM touches the numbers; every value traces to a Sayari field in a cached JSON file on disk. Second, a grounded co-pilot — a Claude tool-use loop over those same typed tools, streamed token-by-token, that cites every claim and is forbidden from fabricating. Cached mode replays four real captured runs, so the full co-pilot demonstration costs zero API spend. Third, MCP-exposed tools — the same six capabilities available to Claude Desktop by direct engine import. The band at the bottom is the finding the whole thing produces: of fifty vendors, forty are OFAC-exposed; a fair name-screen catches thirty-three; four are hidden behind ownership, invisible to any name-screen; three are lost to name variation. Those four red ones are the headline, and you'll watch the system surface them live in a moment. Every file reference on this slide is a clickable link to the code.</a:t>
             </a:r>
           </a:p>
         </p:txBody>
@@ -1146,7 +1146,7 @@
           <a:lstStyle/>
           <a:p>
             <a:r>
-              <a:t>Let me walk you through the actual product, running locally. [Open browser to localhost:8000/ui/] This is the investigations dashboard — a compliance officer's workflow home. I'll open the Q1 2026 Vendor Onboarding case: Meridian's quarterly screening batch, fifty counterparties. The first thing you see on the Compare surface is the Run Composition line — fifty vendors in, forty-nine resolved, forty-five sanctioned by some regime, forty exposed to OFAC specifically. I'll expand it: the tree shows how those numbers nest, and the funnel below is the OFAC subset. Here's the headline: a fair, transliteration-aware name screen catches thirty-three of the forty OFAC-exposed entities. It misses seven — three lost to name variation, and four that are not on the SDN list at all. Those four are blocked under OFAC's fifty-percent rule because a sanctioned party owns them. Sayari catches all forty. [Click MiG Corporation] MiG's name isn't on the SDN, so a name screen finds nothing — but Sayari shows it's sanctioned across multiple regimes, and the ownership graph on the right traces it to United Aircraft Corporation, which IS directly on the SDN and owns nearly seventy-five percent. That's the value proposition in one screen: same vendor, name-screen says clean, Sayari finds a controlling sanctioned parent. Every value on screen is clickable down to the raw cached Sayari response that produced it. Finally [open Co-Pilot] the grounded co-pilot answers the same question conversationally — every step cites a cache file, and it physically can't fabricate, because the typed tools are its only data source.</a:t>
+              <a:t>Let me walk you through the actual product, running locally. [Open localhost:8000/ui/] This is the investigations dashboard. I'll open the Q1 2026 Vendor Onboarding case — Meridian's quarterly screening batch, fifty counterparties. The first thing on the Compare surface is the Run Composition line — fifty in, forty-nine resolved, forty-five sanctioned by some regime, forty exposed to OFAC. I'll expand it: the tree shows how those nest, and the funnel below is the OFAC subset. The headline: a fair, transliteration-aware name screen catches thirty-three of the forty; it misses seven — three to name variation, and four that are not on the SDN at all, blocked under OFAC's fifty-percent rule because a sanctioned party owns them. Sayari catches all forty. [Click MiG Corporation] MiG's name isn't on the SDN, so a name screen finds nothing — but Sayari shows it sanctioned across multiple regimes, and the ownership graph traces it to United Aircraft Corporation, which IS on the SDN and owns nearly seventy-five percent. Same vendor: name-screen says clean, Sayari finds a controlling sanctioned parent. Every value is clickable down to the raw cached Sayari response. Finally [Co-Pilot] the grounded agent answers the same question conversationally — every step cites a cache file, and it can't fabricate, because the typed tools are its only data source.</a:t>
             </a:r>
           </a:p>
         </p:txBody>
@@ -1216,7 +1216,7 @@
           <a:lstStyle/>
           <a:p>
             <a:r>
-              <a:t>This is the architecture. Four parts. A React frontend served as static files — deliberately Babel-standalone with no build step, which I'll defend in a moment. A FastAPI service that is the spine: it exposes the typed tools as HTTP endpoints, streams Server-Sent Events for the upload pipeline and the co-pilot, holds the in-memory OFAC matcher, runs the agent loop, and manages an in-memory credential store. Below that, an importable engine package — pure Python, no web framework — that does resolution, profile extraction, caching, and OFAC matching. The MCP server imports that same engine directly, so Claude Desktop and the web UI share one source of truth for what a tool does. External calls go to the Sayari SDK, a locally-indexed OFAC SDN feed of seventeen thousand rows, and Anthropic. On persistence: the default is file-based, because for a proof of concept inspectability beats scale — every artifact is a JSON file you can open and grep. There's an optional Postgres path with a six-table schema and pg_trgm fuzzy matching, and the code falls back to files when no database URL is set. The thing that ties it together is the CitedResult envelope: every tool returns data plus its source — entity URL, field path, cache file. That's what makes the whole UI auditable. I'd happily go deeper on any layer.</a:t>
+              <a:t>Four parts. A React frontend served as static files — deliberately Babel-standalone with no build step. A FastAPI service that is the spine: it exposes the typed tools as HTTP endpoints, streams Server-Sent Events, holds the in-memory OFAC matcher, runs the agent loop, and manages an in-memory credential store. Below that, an importable pure-Python engine for resolution, profile extraction, and caching. The MCP server imports that same engine directly, so Claude Desktop and the browser share one source of truth. External calls go to the Sayari SDK, a local OFAC feed of seventeen thousand rows, and Anthropic. Persistence is file-first — every artifact is a JSON file you can open and grep — with an optional six-table Postgres path the code falls back from. The thing that ties it together is the CitedResult envelope: every tool returns data plus its source, which is what makes the whole UI auditable.</a:t>
             </a:r>
           </a:p>
         </p:txBody>
@@ -1286,7 +1286,7 @@
           <a:lstStyle/>
           <a:p>
             <a:r>
-              <a:t>I want to pick three decisions to defend, because how I made them matters more than what they are. First: no LLM in the data path. The engine produces every number; the agent can only call typed tools that return cited results. I considered RAG — embedding the Sayari JSON and retrieving — and rejected it because embedding JSON destroys the field structure that makes citations possible. For a compliance customer, an auditor needs to trace a flag to a specific Sayari field months later. Trust here is structural, not prompt-engineered. Second: the OFAC baseline. An early version of my matcher was ASCII-only, and it inadvertently flattered Sayari by under-counting what a real name screen would catch. I rebuilt it with unidecode transliteration and alias indexing, scored at the same threshold as Sayari. That moved Sayari's baseline-comparison number from forty-one down to thirty-three — and the structural argument still wins, because the ownership gap is real regardless of baseline quality. Steelmanning the thing you're comparing against is the honest move. Third: pinned entity IDs. Sayari's default resolution returned subsidiaries instead of parents — for Sberbank, a degree-780 back-office LLC instead of the degree-fifty-nine-thousand parent. I pinned four marquee entities to verified IDs, each with an inline comment explaining the degree and identifier evidence and how to re-verify. Each of these has a road I didn't take, and I'm happy to go deeper on any of them.</a:t>
+              <a:t>Three decisions to defend, because how I made them matters more than what they are. First: no LLM in the data path. The engine produces every number; the agent can only call typed tools that return cited results. I considered RAG and rejected it — embedding JSON destroys the field structure that makes citations possible. For a compliance customer, trust has to be structural, not prompt-engineered. Second: the OFAC baseline. My early matcher was ASCII-only and inadvertently flattered Sayari. I rebuilt it with unidecode transliteration, scored at the same threshold. That moved Sayari's comparison number from forty-one down to thirty-three — and the argument still wins, because the ownership gap is real regardless of baseline quality. Steelmanning the thing you compare against is the honest move. Third: pinned entity IDs. Sayari's default resolution returned a degree-780 back-office LLC for Sberbank instead of the real parent. I pinned four marquee entities to verified IDs, each with a comment explaining the evidence and how to re-verify. Every reference here is clickable.</a:t>
             </a:r>
           </a:p>
         </p:txBody>
@@ -1356,7 +1356,7 @@
           <a:lstStyle/>
           <a:p>
             <a:r>
-              <a:t>On deployment — I want to be upfront. The take-home ships as Docker Compose: one command, runs locally. That's the on-ramp, not the destination. For a FINMA-regulated commodities firm, my default production position is customer-deployed containers in their own cloud tenant. Here's why. Meridian's counterparty data and ownership graphs are subject to Swiss banking secrecy and GDPR — they need data residency. Their compliance team wants to point at a single tenant and say 'our data, our controls.' Multi-tenant SaaS introduces shared-infrastructure caveats that FINMA examiners will probe. Customer-deployed means their existing SOC 2 controls extend to the platform — no new audit surface — and their DR procedures already cover it. The trade-off is that Sayari has to ship deployment templates, runbooks, and an upgrade path. That's FDE work — not just building the app, but the artifacts that let a customer deploy and operate it. I considered multi-tenant SaaS, a Sayari-managed dedicated tenant, and a hybrid split, and I list the trade-offs here. But I want to be honest about what I don't know: I'd want to learn Sayari's existing playbook for enterprise customers before committing. If you have a different default for FINMA-grade financial services, I'd defer to it. This is my reasoning from first principles.</a:t>
+              <a:t>On deployment. The take-home ships as Docker Compose: one command, runs locally. That's the on-ramp, not the destination. For a FINMA-regulated commodities firm, my default is customer-deployed containers in their own cloud tenant. Their counterparty data is subject to Swiss banking secrecy and GDPR — they need data residency. Customer-deployed means their existing SOC 2 controls extend to the platform, and their DR procedures already cover it. The trade-off is that Sayari has to ship templates, runbooks, and an upgrade path — that's FDE work. I considered multi-tenant SaaS, a Sayari-managed tenant, and a hybrid split, and I list the trade-offs. But I'd want to learn Sayari's existing playbook before committing. If you have a different default for financial services, I'd defer to it. This is my reasoning from first principles.</a:t>
             </a:r>
           </a:p>
         </p:txBody>
@@ -1426,7 +1426,7 @@
           <a:lstStyle/>
           <a:p>
             <a:r>
-              <a:t>Two things to close on. First, what I deferred — being honest about it, because I think that honesty is part of the evaluation. Real identity-provider integration is stubbed; the demo login is a localStorage gate. Production Postgres is designed but the default is file storage. Six of my eight marquee entities are served from cached real runs rather than live calls on every load. Prompt-injection guards are a hardening pass — the system prompt forbids fabrication, but I'd add explicit input sanitization before production. And there's no automated CI suite; I relied on type discipline and per-commit curl and behavioral verification. Each was a deliberate choice to spend the eight days on the engine, the observability, and the architectural decisions rather than on hardening that's mostly mechanical. Second, what I'd build next. Meridian's real workflow isn't ad-hoc fifty-vendor investigations — it's quarterly two-thousand-vendor batches, which means bulk mode with parallel agentic execution and result aggregation. Webhook subscriptions so that when Sayari's graph changes — new ownership, new sanctions — the customer's compliance system knows immediately; Sayari's graph as an event source. Customer-configurable risk policies with versioning and approval workflows, surfaced in the briefings. And procurement integration — SAP Ariba, Coupa — to embed screening where compliance officers already live. That last one is the FDE pattern: meet customers in the tools they already use. Happy to dig into any of these in Q&amp;A.</a:t>
+              <a:t>Two things to close on. First, what I deferred — being honest about it. Real identity-provider integration is stubbed; the demo login is a localStorage gate. Production Postgres is designed but the default is file storage. Some marquee entities are served from cached real runs rather than live calls on every load. Prompt-injection guards are a hardening pass. And there's no automated CI; I relied on type discipline and per-commit curl and behavioral verification. Each was a deliberate choice to spend the time on the engine, the observability, and the architecture rather than on hardening that's mostly mechanical. Second, what I'd build next. Meridian's real workflow is quarterly two-thousand-vendor batches — bulk mode with parallel agentic execution. Webhook subscriptions so the customer's compliance system knows when Sayari's graph changes. Customer-configurable risk policies with versioning. And procurement integration — Ariba, Coupa — to embed screening where compliance officers already live. That last one is the FDE pattern: meet customers in the tools they already use.</a:t>
             </a:r>
           </a:p>
         </p:txBody>
@@ -1496,7 +1496,7 @@
           <a:lstStyle/>
           <a:p>
             <a:r>
-              <a:t>If observability comes up in Q&amp;A, this is the slide. The universal contract is the CitedResult envelope: every tool returns data plus a source object — entity URL, raw field path, cache file, API endpoint. Nothing renders in the UI without that provenance. The streaming layer is Server-Sent Events with distinct event types: the agent emits tokens, tool calls, tool results, citations, flags; the upload pipeline emits row events carrying a steps array with the actual per-API-call durations. And the UI matches with three-tier disclosure — a compact row, an expansion showing each API call, and a full payload panel with clickable links straight to the raw cached Sayari JSON. That's what lets an auditor answer 'why did the system flag this entity' weeks later — they click through to the exact field in the exact response.</a:t>
+              <a:t>If observability comes up, this is the slide. The universal contract is the CitedResult envelope: every tool returns data plus a source — entity URL, field path, cache file, API endpoint. Nothing renders without that provenance. The streaming layer is Server-Sent Events with distinct event types for agent reasoning, tool calls, and upload rows. The UI matches with three-tier disclosure — a compact row, an expansion showing each API call, and a full payload panel with clickable links to the raw cached JSON. That's what lets an auditor answer 'why did the system flag this entity' weeks later.</a:t>
             </a:r>
           </a:p>
         </p:txBody>
@@ -4562,7 +4562,7 @@
         </p:nvSpPr>
         <p:spPr>
           <a:xfrm>
-            <a:off x="868680" y="2331720"/>
+            <a:off x="868680" y="2286000"/>
             <a:ext cx="10424160" cy="1280160"/>
           </a:xfrm>
           <a:prstGeom prst="rect">
@@ -4625,7 +4625,7 @@
         </p:nvSpPr>
         <p:spPr>
           <a:xfrm>
-            <a:off x="868680" y="3456432"/>
+            <a:off x="868680" y="3410712"/>
             <a:ext cx="10424160" cy="457200"/>
           </a:xfrm>
           <a:prstGeom prst="rect">
@@ -4670,7 +4670,7 @@
         </p:nvSpPr>
         <p:spPr>
           <a:xfrm>
-            <a:off x="868680" y="4160520"/>
+            <a:off x="868680" y="4114800"/>
             <a:ext cx="10424160" cy="914400"/>
           </a:xfrm>
           <a:prstGeom prst="rect">
@@ -4751,15 +4751,425 @@
           </a:p>
         </p:txBody>
       </p:sp>
-      <p:sp>
-        <p:nvSpPr>
-          <p:cNvPr id="6" name="TextBox 5"/>
+      <p:cxnSp>
+        <p:nvCxnSpPr>
+          <p:cNvPr id="6" name="Connector 5"/>
+          <p:cNvCxnSpPr/>
+          <p:nvPr/>
+        </p:nvCxnSpPr>
+        <p:spPr>
+          <a:xfrm flipV="1">
+            <a:off x="8951976" y="4242816"/>
+            <a:ext cx="1280160" cy="457200"/>
+          </a:xfrm>
+          <a:prstGeom prst="line">
+            <a:avLst/>
+          </a:prstGeom>
+          <a:ln w="12700">
+            <a:solidFill>
+              <a:srgbClr val="1F2A40"/>
+            </a:solidFill>
+          </a:ln>
+          <a:effectLst/>
+        </p:spPr>
+        <p:style>
+          <a:lnRef idx="2">
+            <a:schemeClr val="accent1"/>
+          </a:lnRef>
+          <a:fillRef idx="0">
+            <a:schemeClr val="accent1"/>
+          </a:fillRef>
+          <a:effectRef idx="1">
+            <a:schemeClr val="accent1"/>
+          </a:effectRef>
+          <a:fontRef idx="minor">
+            <a:schemeClr val="tx1"/>
+          </a:fontRef>
+        </p:style>
+      </p:cxnSp>
+      <p:cxnSp>
+        <p:nvCxnSpPr>
+          <p:cNvPr id="7" name="Connector 6"/>
+          <p:cNvCxnSpPr/>
+          <p:nvPr/>
+        </p:nvCxnSpPr>
+        <p:spPr>
+          <a:xfrm>
+            <a:off x="8951976" y="4700016"/>
+            <a:ext cx="1005839" cy="1005840"/>
+          </a:xfrm>
+          <a:prstGeom prst="line">
+            <a:avLst/>
+          </a:prstGeom>
+          <a:ln w="12700">
+            <a:solidFill>
+              <a:srgbClr val="1F2A40"/>
+            </a:solidFill>
+          </a:ln>
+          <a:effectLst/>
+        </p:spPr>
+        <p:style>
+          <a:lnRef idx="2">
+            <a:schemeClr val="accent1"/>
+          </a:lnRef>
+          <a:fillRef idx="0">
+            <a:schemeClr val="accent1"/>
+          </a:fillRef>
+          <a:effectRef idx="1">
+            <a:schemeClr val="accent1"/>
+          </a:effectRef>
+          <a:fontRef idx="minor">
+            <a:schemeClr val="tx1"/>
+          </a:fontRef>
+        </p:style>
+      </p:cxnSp>
+      <p:cxnSp>
+        <p:nvCxnSpPr>
+          <p:cNvPr id="8" name="Connector 7"/>
+          <p:cNvCxnSpPr/>
+          <p:nvPr/>
+        </p:nvCxnSpPr>
+        <p:spPr>
+          <a:xfrm>
+            <a:off x="10232136" y="4242816"/>
+            <a:ext cx="1005840" cy="640080"/>
+          </a:xfrm>
+          <a:prstGeom prst="line">
+            <a:avLst/>
+          </a:prstGeom>
+          <a:ln w="12700">
+            <a:solidFill>
+              <a:srgbClr val="1F2A40"/>
+            </a:solidFill>
+          </a:ln>
+          <a:effectLst/>
+        </p:spPr>
+        <p:style>
+          <a:lnRef idx="2">
+            <a:schemeClr val="accent1"/>
+          </a:lnRef>
+          <a:fillRef idx="0">
+            <a:schemeClr val="accent1"/>
+          </a:fillRef>
+          <a:effectRef idx="1">
+            <a:schemeClr val="accent1"/>
+          </a:effectRef>
+          <a:fontRef idx="minor">
+            <a:schemeClr val="tx1"/>
+          </a:fontRef>
+        </p:style>
+      </p:cxnSp>
+      <p:cxnSp>
+        <p:nvCxnSpPr>
+          <p:cNvPr id="9" name="Connector 8"/>
+          <p:cNvCxnSpPr/>
+          <p:nvPr/>
+        </p:nvCxnSpPr>
+        <p:spPr>
+          <a:xfrm>
+            <a:off x="9957815" y="5705856"/>
+            <a:ext cx="1463040" cy="182880"/>
+          </a:xfrm>
+          <a:prstGeom prst="line">
+            <a:avLst/>
+          </a:prstGeom>
+          <a:ln w="12700">
+            <a:solidFill>
+              <a:srgbClr val="1F2A40"/>
+            </a:solidFill>
+          </a:ln>
+          <a:effectLst/>
+        </p:spPr>
+        <p:style>
+          <a:lnRef idx="2">
+            <a:schemeClr val="accent1"/>
+          </a:lnRef>
+          <a:fillRef idx="0">
+            <a:schemeClr val="accent1"/>
+          </a:fillRef>
+          <a:effectRef idx="1">
+            <a:schemeClr val="accent1"/>
+          </a:effectRef>
+          <a:fontRef idx="minor">
+            <a:schemeClr val="tx1"/>
+          </a:fontRef>
+        </p:style>
+      </p:cxnSp>
+      <p:cxnSp>
+        <p:nvCxnSpPr>
+          <p:cNvPr id="10" name="Connector 9"/>
+          <p:cNvCxnSpPr/>
+          <p:nvPr/>
+        </p:nvCxnSpPr>
+        <p:spPr>
+          <a:xfrm>
+            <a:off x="11237976" y="4882896"/>
+            <a:ext cx="182879" cy="1005840"/>
+          </a:xfrm>
+          <a:prstGeom prst="line">
+            <a:avLst/>
+          </a:prstGeom>
+          <a:ln w="12700">
+            <a:solidFill>
+              <a:srgbClr val="1F2A40"/>
+            </a:solidFill>
+          </a:ln>
+          <a:effectLst/>
+        </p:spPr>
+        <p:style>
+          <a:lnRef idx="2">
+            <a:schemeClr val="accent1"/>
+          </a:lnRef>
+          <a:fillRef idx="0">
+            <a:schemeClr val="accent1"/>
+          </a:fillRef>
+          <a:effectRef idx="1">
+            <a:schemeClr val="accent1"/>
+          </a:effectRef>
+          <a:fontRef idx="minor">
+            <a:schemeClr val="tx1"/>
+          </a:fontRef>
+        </p:style>
+      </p:cxnSp>
+      <p:sp>
+        <p:nvSpPr>
+          <p:cNvPr id="11" name="Oval 10"/>
+          <p:cNvSpPr/>
+          <p:nvPr/>
+        </p:nvSpPr>
+        <p:spPr>
+          <a:xfrm>
+            <a:off x="8869680" y="4617720"/>
+            <a:ext cx="164592" cy="164592"/>
+          </a:xfrm>
+          <a:prstGeom prst="ellipse">
+            <a:avLst/>
+          </a:prstGeom>
+          <a:solidFill>
+            <a:srgbClr val="8A7440"/>
+          </a:solidFill>
+          <a:ln w="12700">
+            <a:solidFill>
+              <a:srgbClr val="2A3854"/>
+            </a:solidFill>
+          </a:ln>
+          <a:effectLst/>
+        </p:spPr>
+        <p:style>
+          <a:lnRef idx="1">
+            <a:schemeClr val="accent1"/>
+          </a:lnRef>
+          <a:fillRef idx="3">
+            <a:schemeClr val="accent1"/>
+          </a:fillRef>
+          <a:effectRef idx="2">
+            <a:schemeClr val="accent1"/>
+          </a:effectRef>
+          <a:fontRef idx="minor">
+            <a:schemeClr val="lt1"/>
+          </a:fontRef>
+        </p:style>
+        <p:txBody>
+          <a:bodyPr rtlCol="0" anchor="ctr"/>
+          <a:lstStyle/>
+          <a:p>
+            <a:pPr algn="ctr"/>
+          </a:p>
+        </p:txBody>
+      </p:sp>
+      <p:sp>
+        <p:nvSpPr>
+          <p:cNvPr id="12" name="Oval 11"/>
+          <p:cNvSpPr/>
+          <p:nvPr/>
+        </p:nvSpPr>
+        <p:spPr>
+          <a:xfrm>
+            <a:off x="10149840" y="4160520"/>
+            <a:ext cx="164592" cy="164592"/>
+          </a:xfrm>
+          <a:prstGeom prst="ellipse">
+            <a:avLst/>
+          </a:prstGeom>
+          <a:solidFill>
+            <a:srgbClr val="0A1628"/>
+          </a:solidFill>
+          <a:ln w="12700">
+            <a:solidFill>
+              <a:srgbClr val="2A3854"/>
+            </a:solidFill>
+          </a:ln>
+          <a:effectLst/>
+        </p:spPr>
+        <p:style>
+          <a:lnRef idx="1">
+            <a:schemeClr val="accent1"/>
+          </a:lnRef>
+          <a:fillRef idx="3">
+            <a:schemeClr val="accent1"/>
+          </a:fillRef>
+          <a:effectRef idx="2">
+            <a:schemeClr val="accent1"/>
+          </a:effectRef>
+          <a:fontRef idx="minor">
+            <a:schemeClr val="lt1"/>
+          </a:fontRef>
+        </p:style>
+        <p:txBody>
+          <a:bodyPr rtlCol="0" anchor="ctr"/>
+          <a:lstStyle/>
+          <a:p>
+            <a:pPr algn="ctr"/>
+          </a:p>
+        </p:txBody>
+      </p:sp>
+      <p:sp>
+        <p:nvSpPr>
+          <p:cNvPr id="13" name="Oval 12"/>
+          <p:cNvSpPr/>
+          <p:nvPr/>
+        </p:nvSpPr>
+        <p:spPr>
+          <a:xfrm>
+            <a:off x="11155680" y="4800600"/>
+            <a:ext cx="164592" cy="164592"/>
+          </a:xfrm>
+          <a:prstGeom prst="ellipse">
+            <a:avLst/>
+          </a:prstGeom>
+          <a:solidFill>
+            <a:srgbClr val="8A7440"/>
+          </a:solidFill>
+          <a:ln w="12700">
+            <a:solidFill>
+              <a:srgbClr val="2A3854"/>
+            </a:solidFill>
+          </a:ln>
+          <a:effectLst/>
+        </p:spPr>
+        <p:style>
+          <a:lnRef idx="1">
+            <a:schemeClr val="accent1"/>
+          </a:lnRef>
+          <a:fillRef idx="3">
+            <a:schemeClr val="accent1"/>
+          </a:fillRef>
+          <a:effectRef idx="2">
+            <a:schemeClr val="accent1"/>
+          </a:effectRef>
+          <a:fontRef idx="minor">
+            <a:schemeClr val="lt1"/>
+          </a:fontRef>
+        </p:style>
+        <p:txBody>
+          <a:bodyPr rtlCol="0" anchor="ctr"/>
+          <a:lstStyle/>
+          <a:p>
+            <a:pPr algn="ctr"/>
+          </a:p>
+        </p:txBody>
+      </p:sp>
+      <p:sp>
+        <p:nvSpPr>
+          <p:cNvPr id="14" name="Oval 13"/>
+          <p:cNvSpPr/>
+          <p:nvPr/>
+        </p:nvSpPr>
+        <p:spPr>
+          <a:xfrm>
+            <a:off x="9875519" y="5623560"/>
+            <a:ext cx="164592" cy="164592"/>
+          </a:xfrm>
+          <a:prstGeom prst="ellipse">
+            <a:avLst/>
+          </a:prstGeom>
+          <a:solidFill>
+            <a:srgbClr val="0A1628"/>
+          </a:solidFill>
+          <a:ln w="12700">
+            <a:solidFill>
+              <a:srgbClr val="2A3854"/>
+            </a:solidFill>
+          </a:ln>
+          <a:effectLst/>
+        </p:spPr>
+        <p:style>
+          <a:lnRef idx="1">
+            <a:schemeClr val="accent1"/>
+          </a:lnRef>
+          <a:fillRef idx="3">
+            <a:schemeClr val="accent1"/>
+          </a:fillRef>
+          <a:effectRef idx="2">
+            <a:schemeClr val="accent1"/>
+          </a:effectRef>
+          <a:fontRef idx="minor">
+            <a:schemeClr val="lt1"/>
+          </a:fontRef>
+        </p:style>
+        <p:txBody>
+          <a:bodyPr rtlCol="0" anchor="ctr"/>
+          <a:lstStyle/>
+          <a:p>
+            <a:pPr algn="ctr"/>
+          </a:p>
+        </p:txBody>
+      </p:sp>
+      <p:sp>
+        <p:nvSpPr>
+          <p:cNvPr id="15" name="Oval 14"/>
+          <p:cNvSpPr/>
+          <p:nvPr/>
+        </p:nvSpPr>
+        <p:spPr>
+          <a:xfrm>
+            <a:off x="11338559" y="5806440"/>
+            <a:ext cx="164592" cy="164592"/>
+          </a:xfrm>
+          <a:prstGeom prst="ellipse">
+            <a:avLst/>
+          </a:prstGeom>
+          <a:solidFill>
+            <a:srgbClr val="0A1628"/>
+          </a:solidFill>
+          <a:ln w="12700">
+            <a:solidFill>
+              <a:srgbClr val="2A3854"/>
+            </a:solidFill>
+          </a:ln>
+          <a:effectLst/>
+        </p:spPr>
+        <p:style>
+          <a:lnRef idx="1">
+            <a:schemeClr val="accent1"/>
+          </a:lnRef>
+          <a:fillRef idx="3">
+            <a:schemeClr val="accent1"/>
+          </a:fillRef>
+          <a:effectRef idx="2">
+            <a:schemeClr val="accent1"/>
+          </a:effectRef>
+          <a:fontRef idx="minor">
+            <a:schemeClr val="lt1"/>
+          </a:fontRef>
+        </p:style>
+        <p:txBody>
+          <a:bodyPr rtlCol="0" anchor="ctr"/>
+          <a:lstStyle/>
+          <a:p>
+            <a:pPr algn="ctr"/>
+          </a:p>
+        </p:txBody>
+      </p:sp>
+      <p:sp>
+        <p:nvSpPr>
+          <p:cNvPr id="16" name="TextBox 15"/>
           <p:cNvSpPr txBox="1"/>
           <p:nvPr/>
         </p:nvSpPr>
         <p:spPr>
           <a:xfrm>
-            <a:off x="868680" y="6035040"/>
+            <a:off x="868680" y="6053328"/>
             <a:ext cx="10424160" cy="548640"/>
           </a:xfrm>
           <a:prstGeom prst="rect">
@@ -4787,9 +5197,10 @@
             <a:r>
               <a:rPr sz="1000" b="0" i="0">
                 <a:solidFill>
-                  <a:srgbClr val="64748B"/>
+                  <a:srgbClr val="8A7440"/>
                 </a:solidFill>
                 <a:latin typeface="JetBrains Mono"/>
+                <a:hlinkClick r:id="rId2"/>
               </a:rPr>
               <a:t>github.com/pnemrow/meridian-sentinel</a:t>
             </a:r>
@@ -5036,7 +5447,7 @@
           </a:xfrm>
           <a:prstGeom prst="roundRect">
             <a:avLst>
-              <a:gd name="adj" fmla="val 6000"/>
+              <a:gd name="adj" fmla="val 5500"/>
             </a:avLst>
           </a:prstGeom>
           <a:solidFill>
@@ -5117,14 +5528,58 @@
       </p:sp>
       <p:sp>
         <p:nvSpPr>
-          <p:cNvPr id="8" name="TextBox 7"/>
+          <p:cNvPr id="8" name="Diamond 7"/>
+          <p:cNvSpPr/>
+          <p:nvPr/>
+        </p:nvSpPr>
+        <p:spPr>
+          <a:xfrm>
+            <a:off x="1051560" y="2157984"/>
+            <a:ext cx="365760" cy="365760"/>
+          </a:xfrm>
+          <a:prstGeom prst="diamond">
+            <a:avLst/>
+          </a:prstGeom>
+          <a:noFill/>
+          <a:ln w="19050">
+            <a:solidFill>
+              <a:srgbClr val="C9A961"/>
+            </a:solidFill>
+          </a:ln>
+          <a:effectLst/>
+        </p:spPr>
+        <p:style>
+          <a:lnRef idx="1">
+            <a:schemeClr val="accent1"/>
+          </a:lnRef>
+          <a:fillRef idx="3">
+            <a:schemeClr val="accent1"/>
+          </a:fillRef>
+          <a:effectRef idx="2">
+            <a:schemeClr val="accent1"/>
+          </a:effectRef>
+          <a:fontRef idx="minor">
+            <a:schemeClr val="lt1"/>
+          </a:fontRef>
+        </p:style>
+        <p:txBody>
+          <a:bodyPr rtlCol="0" anchor="ctr"/>
+          <a:lstStyle/>
+          <a:p>
+            <a:pPr algn="ctr"/>
+          </a:p>
+        </p:txBody>
+      </p:sp>
+      <p:sp>
+        <p:nvSpPr>
+          <p:cNvPr id="9" name="TextBox 8"/>
           <p:cNvSpPr txBox="1"/>
           <p:nvPr/>
         </p:nvSpPr>
         <p:spPr>
           <a:xfrm>
-            <a:off x="1014983" y="2139696"/>
-            <a:ext cx="2962656" cy="2468880"/>
+            <a:off x="1033271" y="2633472"/>
+            <a:ext cx="2962656" cy="1920240"/>
           </a:xfrm>
           <a:prstGeom prst="rect">
             <a:avLst/>
@@ -5167,7 +5622,7 @@
                 <a:spcPts val="0"/>
               </a:spcBef>
               <a:spcAft>
-                <a:spcPts val="900"/>
+                <a:spcPts val="800"/>
               </a:spcAft>
             </a:pPr>
             <a:r>
@@ -5277,7 +5732,7 @@
       </p:sp>
       <p:sp>
         <p:nvSpPr>
-          <p:cNvPr id="9" name="Rounded Rectangle 8"/>
+          <p:cNvPr id="10" name="Rounded Rectangle 9"/>
           <p:cNvSpPr/>
           <p:nvPr/>
         </p:nvSpPr>
@@ -5288,7 +5743,7 @@
           </a:xfrm>
           <a:prstGeom prst="roundRect">
             <a:avLst>
-              <a:gd name="adj" fmla="val 6000"/>
+              <a:gd name="adj" fmla="val 5500"/>
             </a:avLst>
           </a:prstGeom>
           <a:solidFill>
@@ -5325,7 +5780,7 @@
       </p:sp>
       <p:sp>
         <p:nvSpPr>
-          <p:cNvPr id="10" name="Rectangle 9"/>
+          <p:cNvPr id="11" name="Rectangle 10"/>
           <p:cNvSpPr/>
           <p:nvPr/>
         </p:nvSpPr>
@@ -5367,16 +5822,160 @@
           </a:p>
         </p:txBody>
       </p:sp>
-      <p:sp>
-        <p:nvSpPr>
-          <p:cNvPr id="11" name="TextBox 10"/>
+      <p:cxnSp>
+        <p:nvCxnSpPr>
+          <p:cNvPr id="12" name="Connector 11"/>
+          <p:cNvCxnSpPr/>
+          <p:nvPr/>
+        </p:nvCxnSpPr>
+        <p:spPr>
+          <a:xfrm flipH="1">
+            <a:off x="4749393" y="2187244"/>
+            <a:ext cx="102413" cy="153620"/>
+          </a:xfrm>
+          <a:prstGeom prst="line">
+            <a:avLst/>
+          </a:prstGeom>
+          <a:ln w="15240">
+            <a:solidFill>
+              <a:srgbClr val="C9A961"/>
+            </a:solidFill>
+          </a:ln>
+          <a:effectLst/>
+        </p:spPr>
+        <p:style>
+          <a:lnRef idx="2">
+            <a:schemeClr val="accent1"/>
+          </a:lnRef>
+          <a:fillRef idx="0">
+            <a:schemeClr val="accent1"/>
+          </a:fillRef>
+          <a:effectRef idx="1">
+            <a:schemeClr val="accent1"/>
+          </a:effectRef>
+          <a:fontRef idx="minor">
+            <a:schemeClr val="tx1"/>
+          </a:fontRef>
+        </p:style>
+      </p:cxnSp>
+      <p:cxnSp>
+        <p:nvCxnSpPr>
+          <p:cNvPr id="13" name="Connector 12"/>
+          <p:cNvCxnSpPr/>
+          <p:nvPr/>
+        </p:nvCxnSpPr>
+        <p:spPr>
+          <a:xfrm>
+            <a:off x="4749393" y="2340864"/>
+            <a:ext cx="102413" cy="153619"/>
+          </a:xfrm>
+          <a:prstGeom prst="line">
+            <a:avLst/>
+          </a:prstGeom>
+          <a:ln w="15240">
+            <a:solidFill>
+              <a:srgbClr val="C9A961"/>
+            </a:solidFill>
+          </a:ln>
+          <a:effectLst/>
+        </p:spPr>
+        <p:style>
+          <a:lnRef idx="2">
+            <a:schemeClr val="accent1"/>
+          </a:lnRef>
+          <a:fillRef idx="0">
+            <a:schemeClr val="accent1"/>
+          </a:fillRef>
+          <a:effectRef idx="1">
+            <a:schemeClr val="accent1"/>
+          </a:effectRef>
+          <a:fontRef idx="minor">
+            <a:schemeClr val="tx1"/>
+          </a:fontRef>
+        </p:style>
+      </p:cxnSp>
+      <p:cxnSp>
+        <p:nvCxnSpPr>
+          <p:cNvPr id="14" name="Connector 13"/>
+          <p:cNvCxnSpPr/>
+          <p:nvPr/>
+        </p:nvCxnSpPr>
+        <p:spPr>
+          <a:xfrm>
+            <a:off x="4968849" y="2187244"/>
+            <a:ext cx="102413" cy="153620"/>
+          </a:xfrm>
+          <a:prstGeom prst="line">
+            <a:avLst/>
+          </a:prstGeom>
+          <a:ln w="15240">
+            <a:solidFill>
+              <a:srgbClr val="C9A961"/>
+            </a:solidFill>
+          </a:ln>
+          <a:effectLst/>
+        </p:spPr>
+        <p:style>
+          <a:lnRef idx="2">
+            <a:schemeClr val="accent1"/>
+          </a:lnRef>
+          <a:fillRef idx="0">
+            <a:schemeClr val="accent1"/>
+          </a:fillRef>
+          <a:effectRef idx="1">
+            <a:schemeClr val="accent1"/>
+          </a:effectRef>
+          <a:fontRef idx="minor">
+            <a:schemeClr val="tx1"/>
+          </a:fontRef>
+        </p:style>
+      </p:cxnSp>
+      <p:cxnSp>
+        <p:nvCxnSpPr>
+          <p:cNvPr id="15" name="Connector 14"/>
+          <p:cNvCxnSpPr/>
+          <p:nvPr/>
+        </p:nvCxnSpPr>
+        <p:spPr>
+          <a:xfrm flipH="1">
+            <a:off x="4968849" y="2340864"/>
+            <a:ext cx="102413" cy="153619"/>
+          </a:xfrm>
+          <a:prstGeom prst="line">
+            <a:avLst/>
+          </a:prstGeom>
+          <a:ln w="15240">
+            <a:solidFill>
+              <a:srgbClr val="C9A961"/>
+            </a:solidFill>
+          </a:ln>
+          <a:effectLst/>
+        </p:spPr>
+        <p:style>
+          <a:lnRef idx="2">
+            <a:schemeClr val="accent1"/>
+          </a:lnRef>
+          <a:fillRef idx="0">
+            <a:schemeClr val="accent1"/>
+          </a:fillRef>
+          <a:effectRef idx="1">
+            <a:schemeClr val="accent1"/>
+          </a:effectRef>
+          <a:fontRef idx="minor">
+            <a:schemeClr val="tx1"/>
+          </a:fontRef>
+        </p:style>
+      </p:cxnSp>
+      <p:sp>
+        <p:nvSpPr>
+          <p:cNvPr id="16" name="TextBox 15"/>
           <p:cNvSpPr txBox="1"/>
           <p:nvPr/>
         </p:nvSpPr>
         <p:spPr>
           <a:xfrm>
-            <a:off x="4690872" y="2139696"/>
-            <a:ext cx="2962656" cy="2468880"/>
+            <a:off x="4709160" y="2633472"/>
+            <a:ext cx="2962656" cy="1920240"/>
           </a:xfrm>
           <a:prstGeom prst="rect">
             <a:avLst/>
@@ -5419,7 +6018,7 @@
                 <a:spcPts val="0"/>
               </a:spcBef>
               <a:spcAft>
-                <a:spcPts val="900"/>
+                <a:spcPts val="800"/>
               </a:spcAft>
             </a:pPr>
             <a:r>
@@ -5522,14 +6121,14 @@
                 </a:solidFill>
                 <a:latin typeface="Inter"/>
               </a:rPr>
-              <a:t>Caught its own regressions — hooks-order bug, blank-row miscount, d3 coord transforms</a:t>
-            </a:r>
-          </a:p>
-        </p:txBody>
-      </p:sp>
-      <p:sp>
-        <p:nvSpPr>
-          <p:cNvPr id="12" name="Rounded Rectangle 11"/>
+              <a:t>Caught its own regressions — hooks-order, blank-row, d3-coord bugs</a:t>
+            </a:r>
+          </a:p>
+        </p:txBody>
+      </p:sp>
+      <p:sp>
+        <p:nvSpPr>
+          <p:cNvPr id="17" name="Rounded Rectangle 16"/>
           <p:cNvSpPr/>
           <p:nvPr/>
         </p:nvSpPr>
@@ -5540,7 +6139,7 @@
           </a:xfrm>
           <a:prstGeom prst="roundRect">
             <a:avLst>
-              <a:gd name="adj" fmla="val 6000"/>
+              <a:gd name="adj" fmla="val 5500"/>
             </a:avLst>
           </a:prstGeom>
           <a:solidFill>
@@ -5577,7 +6176,7 @@
       </p:sp>
       <p:sp>
         <p:nvSpPr>
-          <p:cNvPr id="13" name="Rectangle 12"/>
+          <p:cNvPr id="18" name="Rectangle 17"/>
           <p:cNvSpPr/>
           <p:nvPr/>
         </p:nvSpPr>
@@ -5621,14 +6220,102 @@
       </p:sp>
       <p:sp>
         <p:nvSpPr>
-          <p:cNvPr id="14" name="TextBox 13"/>
+          <p:cNvPr id="19" name="Oval 18"/>
+          <p:cNvSpPr/>
+          <p:nvPr/>
+        </p:nvSpPr>
+        <p:spPr>
+          <a:xfrm>
+            <a:off x="8505748" y="2157984"/>
+            <a:ext cx="160934" cy="160934"/>
+          </a:xfrm>
+          <a:prstGeom prst="ellipse">
+            <a:avLst/>
+          </a:prstGeom>
+          <a:noFill/>
+          <a:ln w="16510">
+            <a:solidFill>
+              <a:srgbClr val="C9A961"/>
+            </a:solidFill>
+          </a:ln>
+          <a:effectLst/>
+        </p:spPr>
+        <p:style>
+          <a:lnRef idx="1">
+            <a:schemeClr val="accent1"/>
+          </a:lnRef>
+          <a:fillRef idx="3">
+            <a:schemeClr val="accent1"/>
+          </a:fillRef>
+          <a:effectRef idx="2">
+            <a:schemeClr val="accent1"/>
+          </a:effectRef>
+          <a:fontRef idx="minor">
+            <a:schemeClr val="lt1"/>
+          </a:fontRef>
+        </p:style>
+        <p:txBody>
+          <a:bodyPr rtlCol="0" anchor="ctr"/>
+          <a:lstStyle/>
+          <a:p>
+            <a:pPr algn="ctr"/>
+          </a:p>
+        </p:txBody>
+      </p:sp>
+      <p:sp>
+        <p:nvSpPr>
+          <p:cNvPr id="20" name="Block Arc 19"/>
+          <p:cNvSpPr/>
+          <p:nvPr/>
+        </p:nvSpPr>
+        <p:spPr>
+          <a:xfrm>
+            <a:off x="8403336" y="2340864"/>
+            <a:ext cx="365760" cy="292608"/>
+          </a:xfrm>
+          <a:prstGeom prst="blockArc">
+            <a:avLst/>
+          </a:prstGeom>
+          <a:noFill/>
+          <a:ln w="19050">
+            <a:solidFill>
+              <a:srgbClr val="C9A961"/>
+            </a:solidFill>
+          </a:ln>
+          <a:effectLst/>
+        </p:spPr>
+        <p:style>
+          <a:lnRef idx="1">
+            <a:schemeClr val="accent1"/>
+          </a:lnRef>
+          <a:fillRef idx="3">
+            <a:schemeClr val="accent1"/>
+          </a:fillRef>
+          <a:effectRef idx="2">
+            <a:schemeClr val="accent1"/>
+          </a:effectRef>
+          <a:fontRef idx="minor">
+            <a:schemeClr val="lt1"/>
+          </a:fontRef>
+        </p:style>
+        <p:txBody>
+          <a:bodyPr rtlCol="0" anchor="ctr"/>
+          <a:lstStyle/>
+          <a:p>
+            <a:pPr algn="ctr"/>
+          </a:p>
+        </p:txBody>
+      </p:sp>
+      <p:sp>
+        <p:nvSpPr>
+          <p:cNvPr id="21" name="TextBox 20"/>
           <p:cNvSpPr txBox="1"/>
           <p:nvPr/>
         </p:nvSpPr>
         <p:spPr>
           <a:xfrm>
-            <a:off x="8366760" y="2139696"/>
-            <a:ext cx="2962656" cy="2468880"/>
+            <a:off x="8385048" y="2633472"/>
+            <a:ext cx="2962656" cy="1920240"/>
           </a:xfrm>
           <a:prstGeom prst="rect">
             <a:avLst/>
@@ -5671,7 +6358,7 @@
                 <a:spcPts val="0"/>
               </a:spcBef>
               <a:spcAft>
-                <a:spcPts val="900"/>
+                <a:spcPts val="800"/>
               </a:spcAft>
             </a:pPr>
             <a:r>
@@ -5781,7 +6468,7 @@
       </p:sp>
       <p:sp>
         <p:nvSpPr>
-          <p:cNvPr id="15" name="Rounded Rectangle 14"/>
+          <p:cNvPr id="22" name="Rounded Rectangle 21"/>
           <p:cNvSpPr/>
           <p:nvPr/>
         </p:nvSpPr>
@@ -5792,7 +6479,7 @@
           </a:xfrm>
           <a:prstGeom prst="roundRect">
             <a:avLst>
-              <a:gd name="adj" fmla="val 6000"/>
+              <a:gd name="adj" fmla="val 5500"/>
             </a:avLst>
           </a:prstGeom>
           <a:solidFill>
@@ -5829,7 +6516,7 @@
       </p:sp>
       <p:sp>
         <p:nvSpPr>
-          <p:cNvPr id="16" name="TextBox 15"/>
+          <p:cNvPr id="23" name="TextBox 22"/>
           <p:cNvSpPr txBox="1"/>
           <p:nvPr/>
         </p:nvSpPr>
@@ -6107,12 +6794,12 @@
         </p:nvSpPr>
         <p:spPr>
           <a:xfrm>
-            <a:off x="777240" y="1993392"/>
-            <a:ext cx="2578608" cy="4023360"/>
+            <a:off x="777240" y="2057400"/>
+            <a:ext cx="2578608" cy="2697480"/>
           </a:xfrm>
           <a:prstGeom prst="roundRect">
             <a:avLst>
-              <a:gd name="adj" fmla="val 6000"/>
+              <a:gd name="adj" fmla="val 5500"/>
             </a:avLst>
           </a:prstGeom>
           <a:solidFill>
@@ -6155,8 +6842,8 @@
         </p:nvSpPr>
         <p:spPr>
           <a:xfrm>
-            <a:off x="978408" y="2194560"/>
-            <a:ext cx="2194560" cy="3657600"/>
+            <a:off x="978408" y="2249424"/>
+            <a:ext cx="2194560" cy="2331720"/>
           </a:xfrm>
           <a:prstGeom prst="rect">
             <a:avLst/>
@@ -6315,12 +7002,12 @@
         </p:nvSpPr>
         <p:spPr>
           <a:xfrm>
-            <a:off x="3520440" y="1993392"/>
-            <a:ext cx="2578608" cy="4023360"/>
+            <a:off x="3520440" y="2057400"/>
+            <a:ext cx="2578608" cy="2697480"/>
           </a:xfrm>
           <a:prstGeom prst="roundRect">
             <a:avLst>
-              <a:gd name="adj" fmla="val 6000"/>
+              <a:gd name="adj" fmla="val 5500"/>
             </a:avLst>
           </a:prstGeom>
           <a:solidFill>
@@ -6363,8 +7050,8 @@
         </p:nvSpPr>
         <p:spPr>
           <a:xfrm>
-            <a:off x="3721608" y="2194560"/>
-            <a:ext cx="2194560" cy="3657600"/>
+            <a:off x="3721608" y="2249424"/>
+            <a:ext cx="2194560" cy="2331720"/>
           </a:xfrm>
           <a:prstGeom prst="rect">
             <a:avLst/>
@@ -6523,12 +7210,12 @@
         </p:nvSpPr>
         <p:spPr>
           <a:xfrm>
-            <a:off x="6263640" y="1993392"/>
-            <a:ext cx="2578608" cy="4023360"/>
+            <a:off x="6263640" y="2057400"/>
+            <a:ext cx="2578608" cy="2697480"/>
           </a:xfrm>
           <a:prstGeom prst="roundRect">
             <a:avLst>
-              <a:gd name="adj" fmla="val 6000"/>
+              <a:gd name="adj" fmla="val 5500"/>
             </a:avLst>
           </a:prstGeom>
           <a:solidFill>
@@ -6571,8 +7258,8 @@
         </p:nvSpPr>
         <p:spPr>
           <a:xfrm>
-            <a:off x="6464807" y="2194560"/>
-            <a:ext cx="2194560" cy="3657600"/>
+            <a:off x="6464807" y="2249424"/>
+            <a:ext cx="2194560" cy="2331720"/>
           </a:xfrm>
           <a:prstGeom prst="rect">
             <a:avLst/>
@@ -6731,12 +7418,12 @@
         </p:nvSpPr>
         <p:spPr>
           <a:xfrm>
-            <a:off x="9006840" y="1993392"/>
-            <a:ext cx="2578608" cy="4023360"/>
+            <a:off x="9006840" y="2057400"/>
+            <a:ext cx="2578608" cy="2697480"/>
           </a:xfrm>
           <a:prstGeom prst="roundRect">
             <a:avLst>
-              <a:gd name="adj" fmla="val 6000"/>
+              <a:gd name="adj" fmla="val 5500"/>
             </a:avLst>
           </a:prstGeom>
           <a:solidFill>
@@ -6779,8 +7466,8 @@
         </p:nvSpPr>
         <p:spPr>
           <a:xfrm>
-            <a:off x="9208008" y="2194560"/>
-            <a:ext cx="2194560" cy="3657600"/>
+            <a:off x="9208008" y="2249424"/>
+            <a:ext cx="2194560" cy="2331720"/>
           </a:xfrm>
           <a:prstGeom prst="rect">
             <a:avLst/>
@@ -6927,6 +7614,51 @@
                 <a:latin typeface="Inter"/>
               </a:rPr>
               <a:t>Anthropic claude-sonnet-4-6 tool-use loop</a:t>
+            </a:r>
+          </a:p>
+        </p:txBody>
+      </p:sp>
+      <p:sp>
+        <p:nvSpPr>
+          <p:cNvPr id="14" name="TextBox 13"/>
+          <p:cNvSpPr txBox="1"/>
+          <p:nvPr/>
+        </p:nvSpPr>
+        <p:spPr>
+          <a:xfrm>
+            <a:off x="777240" y="5029200"/>
+            <a:ext cx="10625328" cy="457200"/>
+          </a:xfrm>
+          <a:prstGeom prst="rect">
+            <a:avLst/>
+          </a:prstGeom>
+          <a:noFill/>
+        </p:spPr>
+        <p:txBody>
+          <a:bodyPr wrap="square" anchor="t" lIns="0" rIns="0" tIns="0" bIns="0">
+            <a:spAutoFit/>
+          </a:bodyPr>
+          <a:lstStyle/>
+          <a:p>
+            <a:pPr algn="l">
+              <a:lnSpc>
+                <a:spcPct val="120000"/>
+              </a:lnSpc>
+              <a:spcBef>
+                <a:spcPts val="0"/>
+              </a:spcBef>
+              <a:spcAft>
+                <a:spcPts val="400"/>
+              </a:spcAft>
+            </a:pPr>
+            <a:r>
+              <a:rPr sz="1100" b="0" i="1">
+                <a:solidFill>
+                  <a:srgbClr val="64748B"/>
+                </a:solidFill>
+                <a:latin typeface="Inter"/>
+              </a:rPr>
+              <a:t>Two non-obvious choices: Tailwind-free CSS-variable tokens (no build config), and SSE frames persisted as cache files — which is what makes any past investigation replayable from disk.</a:t>
             </a:r>
           </a:p>
         </p:txBody>
@@ -7145,11 +7877,11 @@
         <p:spPr>
           <a:xfrm>
             <a:off x="777240" y="1938528"/>
-            <a:ext cx="5184648" cy="3977639"/>
+            <a:ext cx="5184648" cy="3566160"/>
           </a:xfrm>
           <a:prstGeom prst="roundRect">
             <a:avLst>
-              <a:gd name="adj" fmla="val 6000"/>
+              <a:gd name="adj" fmla="val 5500"/>
             </a:avLst>
           </a:prstGeom>
           <a:solidFill>
@@ -7193,7 +7925,7 @@
         <p:spPr>
           <a:xfrm>
             <a:off x="1005840" y="2121408"/>
-            <a:ext cx="4754880" cy="3657600"/>
+            <a:ext cx="4754880" cy="3200400"/>
           </a:xfrm>
           <a:prstGeom prst="rect">
             <a:avLst/>
@@ -7423,8 +8155,8 @@
         </p:nvSpPr>
         <p:spPr>
           <a:xfrm>
-            <a:off x="1005840" y="5440680"/>
-            <a:ext cx="4754880" cy="457200"/>
+            <a:off x="1005840" y="5074920"/>
+            <a:ext cx="4754880" cy="365760"/>
           </a:xfrm>
           <a:prstGeom prst="rect">
             <a:avLst/>
@@ -7469,11 +8201,11 @@
         <p:spPr>
           <a:xfrm>
             <a:off x="6217920" y="1938528"/>
-            <a:ext cx="5184648" cy="3977639"/>
+            <a:ext cx="5184648" cy="3566160"/>
           </a:xfrm>
           <a:prstGeom prst="roundRect">
             <a:avLst>
-              <a:gd name="adj" fmla="val 6000"/>
+              <a:gd name="adj" fmla="val 5500"/>
             </a:avLst>
           </a:prstGeom>
           <a:solidFill>
@@ -7517,7 +8249,7 @@
         <p:spPr>
           <a:xfrm>
             <a:off x="6446520" y="2121408"/>
-            <a:ext cx="4754880" cy="3657600"/>
+            <a:ext cx="4754880" cy="3200400"/>
           </a:xfrm>
           <a:prstGeom prst="rect">
             <a:avLst/>
@@ -7716,8 +8448,8 @@
         </p:nvSpPr>
         <p:spPr>
           <a:xfrm>
-            <a:off x="6446520" y="5440680"/>
-            <a:ext cx="4754880" cy="457200"/>
+            <a:off x="6446520" y="5074920"/>
+            <a:ext cx="4754880" cy="365760"/>
           </a:xfrm>
           <a:prstGeom prst="rect">
             <a:avLst/>
@@ -7971,7 +8703,7 @@
           </a:xfrm>
           <a:prstGeom prst="roundRect">
             <a:avLst>
-              <a:gd name="adj" fmla="val 6000"/>
+              <a:gd name="adj" fmla="val 5500"/>
             </a:avLst>
           </a:prstGeom>
           <a:solidFill>
@@ -8166,23 +8898,21 @@
           </a:bodyPr>
           <a:lstStyle/>
           <a:p>
-            <a:pPr algn="l">
-              <a:lnSpc>
-                <a:spcPct val="112000"/>
-              </a:lnSpc>
-              <a:spcBef>
-                <a:spcPts val="0"/>
-              </a:spcBef>
-              <a:spcAft>
-                <a:spcPts val="0"/>
-              </a:spcAft>
-            </a:pPr>
-            <a:r>
-              <a:rPr sz="760" b="0" i="0">
+            <a:pPr>
+              <a:lnSpc>
+                <a:spcPct val="105000"/>
+              </a:lnSpc>
+              <a:spcAft>
+                <a:spcPts val="200"/>
+              </a:spcAft>
+            </a:pPr>
+            <a:r>
+              <a:rPr sz="760">
                 <a:solidFill>
                   <a:srgbClr val="8A7440"/>
                 </a:solidFill>
                 <a:latin typeface="JetBrains Mono"/>
+                <a:hlinkClick r:id="rId2"/>
               </a:rPr>
               <a:t>services/api/credentials.py:1-68</a:t>
             </a:r>
@@ -8202,7 +8932,7 @@
           </a:xfrm>
           <a:prstGeom prst="roundRect">
             <a:avLst>
-              <a:gd name="adj" fmla="val 6000"/>
+              <a:gd name="adj" fmla="val 5500"/>
             </a:avLst>
           </a:prstGeom>
           <a:solidFill>
@@ -8397,23 +9127,21 @@
           </a:bodyPr>
           <a:lstStyle/>
           <a:p>
-            <a:pPr algn="l">
-              <a:lnSpc>
-                <a:spcPct val="112000"/>
-              </a:lnSpc>
-              <a:spcBef>
-                <a:spcPts val="0"/>
-              </a:spcBef>
-              <a:spcAft>
-                <a:spcPts val="0"/>
-              </a:spcAft>
-            </a:pPr>
-            <a:r>
-              <a:rPr sz="760" b="0" i="0">
+            <a:pPr>
+              <a:lnSpc>
+                <a:spcPct val="105000"/>
+              </a:lnSpc>
+              <a:spcAft>
+                <a:spcPts val="200"/>
+              </a:spcAft>
+            </a:pPr>
+            <a:r>
+              <a:rPr sz="760">
                 <a:solidFill>
                   <a:srgbClr val="8A7440"/>
                 </a:solidFill>
                 <a:latin typeface="JetBrains Mono"/>
+                <a:hlinkClick r:id="rId3"/>
               </a:rPr>
               <a:t>packages/engine/client.py:17-23</a:t>
             </a:r>
@@ -8433,7 +9161,7 @@
           </a:xfrm>
           <a:prstGeom prst="roundRect">
             <a:avLst>
-              <a:gd name="adj" fmla="val 6000"/>
+              <a:gd name="adj" fmla="val 5500"/>
             </a:avLst>
           </a:prstGeom>
           <a:solidFill>
@@ -8628,23 +9356,21 @@
           </a:bodyPr>
           <a:lstStyle/>
           <a:p>
-            <a:pPr algn="l">
-              <a:lnSpc>
-                <a:spcPct val="112000"/>
-              </a:lnSpc>
-              <a:spcBef>
-                <a:spcPts val="0"/>
-              </a:spcBef>
-              <a:spcAft>
-                <a:spcPts val="0"/>
-              </a:spcAft>
-            </a:pPr>
-            <a:r>
-              <a:rPr sz="760" b="0" i="0">
+            <a:pPr>
+              <a:lnSpc>
+                <a:spcPct val="105000"/>
+              </a:lnSpc>
+              <a:spcAft>
+                <a:spcPts val="200"/>
+              </a:spcAft>
+            </a:pPr>
+            <a:r>
+              <a:rPr sz="760">
                 <a:solidFill>
                   <a:srgbClr val="8A7440"/>
                 </a:solidFill>
                 <a:latin typeface="JetBrains Mono"/>
+                <a:hlinkClick r:id="rId4"/>
               </a:rPr>
               <a:t>services/api/agent/runner.py:131-133</a:t>
             </a:r>
@@ -8664,7 +9390,7 @@
           </a:xfrm>
           <a:prstGeom prst="roundRect">
             <a:avLst>
-              <a:gd name="adj" fmla="val 6000"/>
+              <a:gd name="adj" fmla="val 5500"/>
             </a:avLst>
           </a:prstGeom>
           <a:solidFill>
@@ -9109,25 +9835,65 @@
           </a:bodyPr>
           <a:lstStyle/>
           <a:p>
-            <a:pPr algn="l">
+            <a:pPr>
               <a:lnSpc>
                 <a:spcPct val="105000"/>
               </a:lnSpc>
-              <a:spcBef>
-                <a:spcPts val="0"/>
-              </a:spcBef>
-              <a:spcAft>
-                <a:spcPts val="0"/>
+              <a:spcAft>
+                <a:spcPts val="0"/>
+              </a:spcAft>
+            </a:pPr>
+            <a:r>
+              <a:rPr sz="930">
+                <a:solidFill>
+                  <a:srgbClr val="F0F4F8"/>
+                </a:solidFill>
+                <a:latin typeface="JetBrains Mono"/>
+                <a:hlinkClick r:id="rId2"/>
+              </a:rPr>
+              <a:t>design-prototype/index.html</a:t>
+            </a:r>
+          </a:p>
+          <a:p>
+            <a:pPr algn="l">
+              <a:lnSpc>
+                <a:spcPct val="100000"/>
+              </a:lnSpc>
+              <a:spcBef>
+                <a:spcPts val="0"/>
+              </a:spcBef>
+              <a:spcAft>
+                <a:spcPts val="700"/>
               </a:spcAft>
             </a:pPr>
             <a:r>
               <a:rPr sz="930" b="0" i="0">
                 <a:solidFill>
+                  <a:srgbClr val="64748B"/>
+                </a:solidFill>
+                <a:latin typeface="Inter"/>
+              </a:rPr>
+              <a:t>Babel-standalone loader — the no-build evidence</a:t>
+            </a:r>
+          </a:p>
+          <a:p>
+            <a:pPr>
+              <a:lnSpc>
+                <a:spcPct val="105000"/>
+              </a:lnSpc>
+              <a:spcAft>
+                <a:spcPts val="0"/>
+              </a:spcAft>
+            </a:pPr>
+            <a:r>
+              <a:rPr sz="930">
+                <a:solidFill>
                   <a:srgbClr val="F0F4F8"/>
                 </a:solidFill>
                 <a:latin typeface="JetBrains Mono"/>
-              </a:rPr>
-              <a:t>design-prototype/index.html</a:t>
+                <a:hlinkClick r:id="rId3"/>
+              </a:rPr>
+              <a:t>design-prototype/app.jsx</a:t>
             </a:r>
           </a:p>
           <a:p>
@@ -9149,29 +9915,69 @@
                 </a:solidFill>
                 <a:latin typeface="Inter"/>
               </a:rPr>
-              <a:t>Babel-standalone loader — the no-build evidence</a:t>
-            </a:r>
-          </a:p>
-          <a:p>
-            <a:pPr algn="l">
+              <a:t>Hash router + app shell</a:t>
+            </a:r>
+          </a:p>
+          <a:p>
+            <a:pPr>
               <a:lnSpc>
                 <a:spcPct val="105000"/>
               </a:lnSpc>
-              <a:spcBef>
-                <a:spcPts val="0"/>
-              </a:spcBef>
-              <a:spcAft>
-                <a:spcPts val="0"/>
+              <a:spcAft>
+                <a:spcPts val="0"/>
+              </a:spcAft>
+            </a:pPr>
+            <a:r>
+              <a:rPr sz="930">
+                <a:solidFill>
+                  <a:srgbClr val="F0F4F8"/>
+                </a:solidFill>
+                <a:latin typeface="JetBrains Mono"/>
+                <a:hlinkClick r:id="rId4"/>
+              </a:rPr>
+              <a:t>design-prototype/surfaces/compare.jsx</a:t>
+            </a:r>
+          </a:p>
+          <a:p>
+            <a:pPr algn="l">
+              <a:lnSpc>
+                <a:spcPct val="100000"/>
+              </a:lnSpc>
+              <a:spcBef>
+                <a:spcPts val="0"/>
+              </a:spcBef>
+              <a:spcAft>
+                <a:spcPts val="700"/>
               </a:spcAft>
             </a:pPr>
             <a:r>
               <a:rPr sz="930" b="0" i="0">
                 <a:solidFill>
+                  <a:srgbClr val="64748B"/>
+                </a:solidFill>
+                <a:latin typeface="Inter"/>
+              </a:rPr>
+              <a:t>Compare hero + Run Composition</a:t>
+            </a:r>
+          </a:p>
+          <a:p>
+            <a:pPr>
+              <a:lnSpc>
+                <a:spcPct val="105000"/>
+              </a:lnSpc>
+              <a:spcAft>
+                <a:spcPts val="0"/>
+              </a:spcAft>
+            </a:pPr>
+            <a:r>
+              <a:rPr sz="930">
+                <a:solidFill>
                   <a:srgbClr val="F0F4F8"/>
                 </a:solidFill>
                 <a:latin typeface="JetBrains Mono"/>
-              </a:rPr>
-              <a:t>design-prototype/app.jsx</a:t>
+                <a:hlinkClick r:id="rId5"/>
+              </a:rPr>
+              <a:t>design-prototype/surfaces/entity.jsx</a:t>
             </a:r>
           </a:p>
           <a:p>
@@ -9193,29 +9999,69 @@
                 </a:solidFill>
                 <a:latin typeface="Inter"/>
               </a:rPr>
-              <a:t>Hash router + app shell</a:t>
-            </a:r>
-          </a:p>
-          <a:p>
-            <a:pPr algn="l">
+              <a:t>Entity detail + ownership graph</a:t>
+            </a:r>
+          </a:p>
+          <a:p>
+            <a:pPr>
               <a:lnSpc>
                 <a:spcPct val="105000"/>
               </a:lnSpc>
-              <a:spcBef>
-                <a:spcPts val="0"/>
-              </a:spcBef>
-              <a:spcAft>
-                <a:spcPts val="0"/>
+              <a:spcAft>
+                <a:spcPts val="0"/>
+              </a:spcAft>
+            </a:pPr>
+            <a:r>
+              <a:rPr sz="930">
+                <a:solidFill>
+                  <a:srgbClr val="F0F4F8"/>
+                </a:solidFill>
+                <a:latin typeface="JetBrains Mono"/>
+                <a:hlinkClick r:id="rId6"/>
+              </a:rPr>
+              <a:t>design-prototype/surfaces/upload.jsx</a:t>
+            </a:r>
+          </a:p>
+          <a:p>
+            <a:pPr algn="l">
+              <a:lnSpc>
+                <a:spcPct val="100000"/>
+              </a:lnSpc>
+              <a:spcBef>
+                <a:spcPts val="0"/>
+              </a:spcBef>
+              <a:spcAft>
+                <a:spcPts val="700"/>
               </a:spcAft>
             </a:pPr>
             <a:r>
               <a:rPr sz="930" b="0" i="0">
                 <a:solidFill>
+                  <a:srgbClr val="64748B"/>
+                </a:solidFill>
+                <a:latin typeface="Inter"/>
+              </a:rPr>
+              <a:t>Validate-and-Run SSE trace</a:t>
+            </a:r>
+          </a:p>
+          <a:p>
+            <a:pPr>
+              <a:lnSpc>
+                <a:spcPct val="105000"/>
+              </a:lnSpc>
+              <a:spcAft>
+                <a:spcPts val="0"/>
+              </a:spcAft>
+            </a:pPr>
+            <a:r>
+              <a:rPr sz="930">
+                <a:solidFill>
                   <a:srgbClr val="F0F4F8"/>
                 </a:solidFill>
                 <a:latin typeface="JetBrains Mono"/>
-              </a:rPr>
-              <a:t>design-prototype/surfaces/compare.jsx</a:t>
+                <a:hlinkClick r:id="rId7"/>
+              </a:rPr>
+              <a:t>design-prototype/surfaces/copilot.jsx</a:t>
             </a:r>
           </a:p>
           <a:p>
@@ -9237,159 +10083,25 @@
                 </a:solidFill>
                 <a:latin typeface="Inter"/>
               </a:rPr>
-              <a:t>Compare hero + Run Composition</a:t>
-            </a:r>
-          </a:p>
-          <a:p>
-            <a:pPr algn="l">
+              <a:t>Grounded co-pilot</a:t>
+            </a:r>
+          </a:p>
+          <a:p>
+            <a:pPr>
               <a:lnSpc>
                 <a:spcPct val="105000"/>
               </a:lnSpc>
-              <a:spcBef>
-                <a:spcPts val="0"/>
-              </a:spcBef>
-              <a:spcAft>
-                <a:spcPts val="0"/>
-              </a:spcAft>
-            </a:pPr>
-            <a:r>
-              <a:rPr sz="930" b="0" i="0">
+              <a:spcAft>
+                <a:spcPts val="0"/>
+              </a:spcAft>
+            </a:pPr>
+            <a:r>
+              <a:rPr sz="930">
                 <a:solidFill>
                   <a:srgbClr val="F0F4F8"/>
                 </a:solidFill>
                 <a:latin typeface="JetBrains Mono"/>
-              </a:rPr>
-              <a:t>design-prototype/surfaces/entity.jsx</a:t>
-            </a:r>
-          </a:p>
-          <a:p>
-            <a:pPr algn="l">
-              <a:lnSpc>
-                <a:spcPct val="100000"/>
-              </a:lnSpc>
-              <a:spcBef>
-                <a:spcPts val="0"/>
-              </a:spcBef>
-              <a:spcAft>
-                <a:spcPts val="700"/>
-              </a:spcAft>
-            </a:pPr>
-            <a:r>
-              <a:rPr sz="930" b="0" i="0">
-                <a:solidFill>
-                  <a:srgbClr val="64748B"/>
-                </a:solidFill>
-                <a:latin typeface="Inter"/>
-              </a:rPr>
-              <a:t>Entity detail + ownership graph</a:t>
-            </a:r>
-          </a:p>
-          <a:p>
-            <a:pPr algn="l">
-              <a:lnSpc>
-                <a:spcPct val="105000"/>
-              </a:lnSpc>
-              <a:spcBef>
-                <a:spcPts val="0"/>
-              </a:spcBef>
-              <a:spcAft>
-                <a:spcPts val="0"/>
-              </a:spcAft>
-            </a:pPr>
-            <a:r>
-              <a:rPr sz="930" b="0" i="0">
-                <a:solidFill>
-                  <a:srgbClr val="F0F4F8"/>
-                </a:solidFill>
-                <a:latin typeface="JetBrains Mono"/>
-              </a:rPr>
-              <a:t>design-prototype/surfaces/upload.jsx</a:t>
-            </a:r>
-          </a:p>
-          <a:p>
-            <a:pPr algn="l">
-              <a:lnSpc>
-                <a:spcPct val="100000"/>
-              </a:lnSpc>
-              <a:spcBef>
-                <a:spcPts val="0"/>
-              </a:spcBef>
-              <a:spcAft>
-                <a:spcPts val="700"/>
-              </a:spcAft>
-            </a:pPr>
-            <a:r>
-              <a:rPr sz="930" b="0" i="0">
-                <a:solidFill>
-                  <a:srgbClr val="64748B"/>
-                </a:solidFill>
-                <a:latin typeface="Inter"/>
-              </a:rPr>
-              <a:t>Validate-and-Run SSE trace</a:t>
-            </a:r>
-          </a:p>
-          <a:p>
-            <a:pPr algn="l">
-              <a:lnSpc>
-                <a:spcPct val="105000"/>
-              </a:lnSpc>
-              <a:spcBef>
-                <a:spcPts val="0"/>
-              </a:spcBef>
-              <a:spcAft>
-                <a:spcPts val="0"/>
-              </a:spcAft>
-            </a:pPr>
-            <a:r>
-              <a:rPr sz="930" b="0" i="0">
-                <a:solidFill>
-                  <a:srgbClr val="F0F4F8"/>
-                </a:solidFill>
-                <a:latin typeface="JetBrains Mono"/>
-              </a:rPr>
-              <a:t>design-prototype/surfaces/copilot.jsx</a:t>
-            </a:r>
-          </a:p>
-          <a:p>
-            <a:pPr algn="l">
-              <a:lnSpc>
-                <a:spcPct val="100000"/>
-              </a:lnSpc>
-              <a:spcBef>
-                <a:spcPts val="0"/>
-              </a:spcBef>
-              <a:spcAft>
-                <a:spcPts val="700"/>
-              </a:spcAft>
-            </a:pPr>
-            <a:r>
-              <a:rPr sz="930" b="0" i="0">
-                <a:solidFill>
-                  <a:srgbClr val="64748B"/>
-                </a:solidFill>
-                <a:latin typeface="Inter"/>
-              </a:rPr>
-              <a:t>Grounded co-pilot</a:t>
-            </a:r>
-          </a:p>
-          <a:p>
-            <a:pPr algn="l">
-              <a:lnSpc>
-                <a:spcPct val="105000"/>
-              </a:lnSpc>
-              <a:spcBef>
-                <a:spcPts val="0"/>
-              </a:spcBef>
-              <a:spcAft>
-                <a:spcPts val="0"/>
-              </a:spcAft>
-            </a:pPr>
-            <a:r>
-              <a:rPr sz="930" b="0" i="0">
-                <a:solidFill>
-                  <a:srgbClr val="F0F4F8"/>
-                </a:solidFill>
-                <a:latin typeface="JetBrains Mono"/>
+                <a:hlinkClick r:id="rId8"/>
               </a:rPr>
               <a:t>design-prototype/components/primitives.jsx</a:t>
             </a:r>
@@ -9485,25 +10197,65 @@
           </a:bodyPr>
           <a:lstStyle/>
           <a:p>
-            <a:pPr algn="l">
+            <a:pPr>
               <a:lnSpc>
                 <a:spcPct val="105000"/>
               </a:lnSpc>
-              <a:spcBef>
-                <a:spcPts val="0"/>
-              </a:spcBef>
-              <a:spcAft>
-                <a:spcPts val="0"/>
+              <a:spcAft>
+                <a:spcPts val="0"/>
+              </a:spcAft>
+            </a:pPr>
+            <a:r>
+              <a:rPr sz="930">
+                <a:solidFill>
+                  <a:srgbClr val="F0F4F8"/>
+                </a:solidFill>
+                <a:latin typeface="JetBrains Mono"/>
+                <a:hlinkClick r:id="rId9"/>
+              </a:rPr>
+              <a:t>services/api/main.py</a:t>
+            </a:r>
+          </a:p>
+          <a:p>
+            <a:pPr algn="l">
+              <a:lnSpc>
+                <a:spcPct val="100000"/>
+              </a:lnSpc>
+              <a:spcBef>
+                <a:spcPts val="0"/>
+              </a:spcBef>
+              <a:spcAft>
+                <a:spcPts val="700"/>
               </a:spcAft>
             </a:pPr>
             <a:r>
               <a:rPr sz="930" b="0" i="0">
                 <a:solidFill>
+                  <a:srgbClr val="64748B"/>
+                </a:solidFill>
+                <a:latin typeface="Inter"/>
+              </a:rPr>
+              <a:t>FastAPI tools API + SSE + static mounts</a:t>
+            </a:r>
+          </a:p>
+          <a:p>
+            <a:pPr>
+              <a:lnSpc>
+                <a:spcPct val="105000"/>
+              </a:lnSpc>
+              <a:spcAft>
+                <a:spcPts val="0"/>
+              </a:spcAft>
+            </a:pPr>
+            <a:r>
+              <a:rPr sz="930">
+                <a:solidFill>
                   <a:srgbClr val="F0F4F8"/>
                 </a:solidFill>
                 <a:latin typeface="JetBrains Mono"/>
-              </a:rPr>
-              <a:t>services/api/main.py</a:t>
+                <a:hlinkClick r:id="rId10"/>
+              </a:rPr>
+              <a:t>packages/engine/profile.py</a:t>
             </a:r>
           </a:p>
           <a:p>
@@ -9525,29 +10277,69 @@
                 </a:solidFill>
                 <a:latin typeface="Inter"/>
               </a:rPr>
-              <a:t>FastAPI tools API + SSE + static mounts</a:t>
-            </a:r>
-          </a:p>
-          <a:p>
-            <a:pPr algn="l">
+              <a:t>extract_profile — single source of truth</a:t>
+            </a:r>
+          </a:p>
+          <a:p>
+            <a:pPr>
               <a:lnSpc>
                 <a:spcPct val="105000"/>
               </a:lnSpc>
-              <a:spcBef>
-                <a:spcPts val="0"/>
-              </a:spcBef>
-              <a:spcAft>
-                <a:spcPts val="0"/>
+              <a:spcAft>
+                <a:spcPts val="0"/>
+              </a:spcAft>
+            </a:pPr>
+            <a:r>
+              <a:rPr sz="930">
+                <a:solidFill>
+                  <a:srgbClr val="F0F4F8"/>
+                </a:solidFill>
+                <a:latin typeface="JetBrains Mono"/>
+                <a:hlinkClick r:id="rId11"/>
+              </a:rPr>
+              <a:t>packages/engine/resolve.py</a:t>
+            </a:r>
+          </a:p>
+          <a:p>
+            <a:pPr algn="l">
+              <a:lnSpc>
+                <a:spcPct val="100000"/>
+              </a:lnSpc>
+              <a:spcBef>
+                <a:spcPts val="0"/>
+              </a:spcBef>
+              <a:spcAft>
+                <a:spcPts val="700"/>
               </a:spcAft>
             </a:pPr>
             <a:r>
               <a:rPr sz="930" b="0" i="0">
                 <a:solidFill>
+                  <a:srgbClr val="64748B"/>
+                </a:solidFill>
+                <a:latin typeface="Inter"/>
+              </a:rPr>
+              <a:t>PINNED_IDS with audit comments</a:t>
+            </a:r>
+          </a:p>
+          <a:p>
+            <a:pPr>
+              <a:lnSpc>
+                <a:spcPct val="105000"/>
+              </a:lnSpc>
+              <a:spcAft>
+                <a:spcPts val="0"/>
+              </a:spcAft>
+            </a:pPr>
+            <a:r>
+              <a:rPr sz="930">
+                <a:solidFill>
                   <a:srgbClr val="F0F4F8"/>
                 </a:solidFill>
                 <a:latin typeface="JetBrains Mono"/>
-              </a:rPr>
-              <a:t>packages/engine/profile.py</a:t>
+                <a:hlinkClick r:id="rId12"/>
+              </a:rPr>
+              <a:t>services/api/tools/compare_ofac_vs_sayari.py</a:t>
             </a:r>
           </a:p>
           <a:p>
@@ -9569,29 +10361,69 @@
                 </a:solidFill>
                 <a:latin typeface="Inter"/>
               </a:rPr>
-              <a:t>extract_profile — single source of truth</a:t>
-            </a:r>
-          </a:p>
-          <a:p>
-            <a:pPr algn="l">
+              <a:t>The headline reconciliation</a:t>
+            </a:r>
+          </a:p>
+          <a:p>
+            <a:pPr>
               <a:lnSpc>
                 <a:spcPct val="105000"/>
               </a:lnSpc>
-              <a:spcBef>
-                <a:spcPts val="0"/>
-              </a:spcBef>
-              <a:spcAft>
-                <a:spcPts val="0"/>
+              <a:spcAft>
+                <a:spcPts val="0"/>
+              </a:spcAft>
+            </a:pPr>
+            <a:r>
+              <a:rPr sz="930">
+                <a:solidFill>
+                  <a:srgbClr val="F0F4F8"/>
+                </a:solidFill>
+                <a:latin typeface="JetBrains Mono"/>
+                <a:hlinkClick r:id="rId13"/>
+              </a:rPr>
+              <a:t>services/api/tools/traverse_ownership.py</a:t>
+            </a:r>
+          </a:p>
+          <a:p>
+            <a:pPr algn="l">
+              <a:lnSpc>
+                <a:spcPct val="100000"/>
+              </a:lnSpc>
+              <a:spcBef>
+                <a:spcPts val="0"/>
+              </a:spcBef>
+              <a:spcAft>
+                <a:spcPts val="700"/>
               </a:spcAft>
             </a:pPr>
             <a:r>
               <a:rPr sz="930" b="0" i="0">
                 <a:solidFill>
+                  <a:srgbClr val="64748B"/>
+                </a:solidFill>
+                <a:latin typeface="Inter"/>
+              </a:rPr>
+              <a:t>Cache-first ownership traversal</a:t>
+            </a:r>
+          </a:p>
+          <a:p>
+            <a:pPr>
+              <a:lnSpc>
+                <a:spcPct val="105000"/>
+              </a:lnSpc>
+              <a:spcAft>
+                <a:spcPts val="0"/>
+              </a:spcAft>
+            </a:pPr>
+            <a:r>
+              <a:rPr sz="930">
+                <a:solidFill>
                   <a:srgbClr val="F0F4F8"/>
                 </a:solidFill>
                 <a:latin typeface="JetBrains Mono"/>
-              </a:rPr>
-              <a:t>packages/engine/resolve.py</a:t>
+                <a:hlinkClick r:id="rId14"/>
+              </a:rPr>
+              <a:t>services/api/tools/generate_briefing.py</a:t>
             </a:r>
           </a:p>
           <a:p>
@@ -9613,203 +10445,67 @@
                 </a:solidFill>
                 <a:latin typeface="Inter"/>
               </a:rPr>
-              <a:t>PINNED_IDS with audit comments</a:t>
-            </a:r>
-          </a:p>
-          <a:p>
-            <a:pPr algn="l">
+              <a:t>WeasyPrint + HTML fallback</a:t>
+            </a:r>
+          </a:p>
+          <a:p>
+            <a:pPr>
               <a:lnSpc>
                 <a:spcPct val="105000"/>
               </a:lnSpc>
-              <a:spcBef>
-                <a:spcPts val="0"/>
-              </a:spcBef>
-              <a:spcAft>
-                <a:spcPts val="0"/>
+              <a:spcAft>
+                <a:spcPts val="0"/>
+              </a:spcAft>
+            </a:pPr>
+            <a:r>
+              <a:rPr sz="930">
+                <a:solidFill>
+                  <a:srgbClr val="F0F4F8"/>
+                </a:solidFill>
+                <a:latin typeface="JetBrains Mono"/>
+                <a:hlinkClick r:id="rId15"/>
+              </a:rPr>
+              <a:t>services/api/agent/runner.py</a:t>
+            </a:r>
+          </a:p>
+          <a:p>
+            <a:pPr algn="l">
+              <a:lnSpc>
+                <a:spcPct val="100000"/>
+              </a:lnSpc>
+              <a:spcBef>
+                <a:spcPts val="0"/>
+              </a:spcBef>
+              <a:spcAft>
+                <a:spcPts val="700"/>
               </a:spcAft>
             </a:pPr>
             <a:r>
               <a:rPr sz="930" b="0" i="0">
                 <a:solidFill>
+                  <a:srgbClr val="64748B"/>
+                </a:solidFill>
+                <a:latin typeface="Inter"/>
+              </a:rPr>
+              <a:t>Claude tool-use loop (SSE)</a:t>
+            </a:r>
+          </a:p>
+          <a:p>
+            <a:pPr>
+              <a:lnSpc>
+                <a:spcPct val="105000"/>
+              </a:lnSpc>
+              <a:spcAft>
+                <a:spcPts val="0"/>
+              </a:spcAft>
+            </a:pPr>
+            <a:r>
+              <a:rPr sz="930">
+                <a:solidFill>
                   <a:srgbClr val="F0F4F8"/>
                 </a:solidFill>
                 <a:latin typeface="JetBrains Mono"/>
-              </a:rPr>
-              <a:t>services/api/tools/compare_ofac_vs_sayari.py</a:t>
-            </a:r>
-          </a:p>
-          <a:p>
-            <a:pPr algn="l">
-              <a:lnSpc>
-                <a:spcPct val="100000"/>
-              </a:lnSpc>
-              <a:spcBef>
-                <a:spcPts val="0"/>
-              </a:spcBef>
-              <a:spcAft>
-                <a:spcPts val="700"/>
-              </a:spcAft>
-            </a:pPr>
-            <a:r>
-              <a:rPr sz="930" b="0" i="0">
-                <a:solidFill>
-                  <a:srgbClr val="64748B"/>
-                </a:solidFill>
-                <a:latin typeface="Inter"/>
-              </a:rPr>
-              <a:t>The headline reconciliation</a:t>
-            </a:r>
-          </a:p>
-          <a:p>
-            <a:pPr algn="l">
-              <a:lnSpc>
-                <a:spcPct val="105000"/>
-              </a:lnSpc>
-              <a:spcBef>
-                <a:spcPts val="0"/>
-              </a:spcBef>
-              <a:spcAft>
-                <a:spcPts val="0"/>
-              </a:spcAft>
-            </a:pPr>
-            <a:r>
-              <a:rPr sz="930" b="0" i="0">
-                <a:solidFill>
-                  <a:srgbClr val="F0F4F8"/>
-                </a:solidFill>
-                <a:latin typeface="JetBrains Mono"/>
-              </a:rPr>
-              <a:t>services/api/tools/traverse_ownership.py</a:t>
-            </a:r>
-          </a:p>
-          <a:p>
-            <a:pPr algn="l">
-              <a:lnSpc>
-                <a:spcPct val="100000"/>
-              </a:lnSpc>
-              <a:spcBef>
-                <a:spcPts val="0"/>
-              </a:spcBef>
-              <a:spcAft>
-                <a:spcPts val="700"/>
-              </a:spcAft>
-            </a:pPr>
-            <a:r>
-              <a:rPr sz="930" b="0" i="0">
-                <a:solidFill>
-                  <a:srgbClr val="64748B"/>
-                </a:solidFill>
-                <a:latin typeface="Inter"/>
-              </a:rPr>
-              <a:t>Cache-first ownership traversal</a:t>
-            </a:r>
-          </a:p>
-          <a:p>
-            <a:pPr algn="l">
-              <a:lnSpc>
-                <a:spcPct val="105000"/>
-              </a:lnSpc>
-              <a:spcBef>
-                <a:spcPts val="0"/>
-              </a:spcBef>
-              <a:spcAft>
-                <a:spcPts val="0"/>
-              </a:spcAft>
-            </a:pPr>
-            <a:r>
-              <a:rPr sz="930" b="0" i="0">
-                <a:solidFill>
-                  <a:srgbClr val="F0F4F8"/>
-                </a:solidFill>
-                <a:latin typeface="JetBrains Mono"/>
-              </a:rPr>
-              <a:t>services/api/tools/generate_briefing.py</a:t>
-            </a:r>
-          </a:p>
-          <a:p>
-            <a:pPr algn="l">
-              <a:lnSpc>
-                <a:spcPct val="100000"/>
-              </a:lnSpc>
-              <a:spcBef>
-                <a:spcPts val="0"/>
-              </a:spcBef>
-              <a:spcAft>
-                <a:spcPts val="700"/>
-              </a:spcAft>
-            </a:pPr>
-            <a:r>
-              <a:rPr sz="930" b="0" i="0">
-                <a:solidFill>
-                  <a:srgbClr val="64748B"/>
-                </a:solidFill>
-                <a:latin typeface="Inter"/>
-              </a:rPr>
-              <a:t>WeasyPrint + HTML fallback</a:t>
-            </a:r>
-          </a:p>
-          <a:p>
-            <a:pPr algn="l">
-              <a:lnSpc>
-                <a:spcPct val="105000"/>
-              </a:lnSpc>
-              <a:spcBef>
-                <a:spcPts val="0"/>
-              </a:spcBef>
-              <a:spcAft>
-                <a:spcPts val="0"/>
-              </a:spcAft>
-            </a:pPr>
-            <a:r>
-              <a:rPr sz="930" b="0" i="0">
-                <a:solidFill>
-                  <a:srgbClr val="F0F4F8"/>
-                </a:solidFill>
-                <a:latin typeface="JetBrains Mono"/>
-              </a:rPr>
-              <a:t>services/api/agent/runner.py</a:t>
-            </a:r>
-          </a:p>
-          <a:p>
-            <a:pPr algn="l">
-              <a:lnSpc>
-                <a:spcPct val="100000"/>
-              </a:lnSpc>
-              <a:spcBef>
-                <a:spcPts val="0"/>
-              </a:spcBef>
-              <a:spcAft>
-                <a:spcPts val="700"/>
-              </a:spcAft>
-            </a:pPr>
-            <a:r>
-              <a:rPr sz="930" b="0" i="0">
-                <a:solidFill>
-                  <a:srgbClr val="64748B"/>
-                </a:solidFill>
-                <a:latin typeface="Inter"/>
-              </a:rPr>
-              <a:t>Claude tool-use loop (SSE)</a:t>
-            </a:r>
-          </a:p>
-          <a:p>
-            <a:pPr algn="l">
-              <a:lnSpc>
-                <a:spcPct val="105000"/>
-              </a:lnSpc>
-              <a:spcBef>
-                <a:spcPts val="0"/>
-              </a:spcBef>
-              <a:spcAft>
-                <a:spcPts val="0"/>
-              </a:spcAft>
-            </a:pPr>
-            <a:r>
-              <a:rPr sz="930" b="0" i="0">
-                <a:solidFill>
-                  <a:srgbClr val="F0F4F8"/>
-                </a:solidFill>
-                <a:latin typeface="JetBrains Mono"/>
+                <a:hlinkClick r:id="rId16"/>
               </a:rPr>
               <a:t>services/mcp/server.py</a:t>
             </a:r>
@@ -9874,11 +10570,21 @@
             <a:r>
               <a:rPr sz="900" b="0" i="0">
                 <a:solidFill>
+                  <a:srgbClr val="64748B"/>
+                </a:solidFill>
+                <a:latin typeface="Inter"/>
+              </a:rPr>
+              <a:t>Every file name is a clickable link  ·  </a:t>
+            </a:r>
+            <a:r>
+              <a:rPr sz="900" b="0" i="0">
+                <a:solidFill>
                   <a:srgbClr val="8A7440"/>
                 </a:solidFill>
                 <a:latin typeface="JetBrains Mono"/>
-              </a:rPr>
-              <a:t>All paths resolve at  github.com/pnemrow/meridian-sentinel/blob/master/&lt;path&gt;</a:t>
+                <a:hlinkClick r:id="rId17"/>
+              </a:rPr>
+              <a:t>github.com/pnemrow/meridian-sentinel</a:t>
             </a:r>
           </a:p>
         </p:txBody>
@@ -10064,7 +10770,6 @@
             <a:spAutoFit/>
           </a:bodyPr>
           <a:lstStyle/>
-          <a:p/>
           <a:p>
             <a:pPr algn="l">
               <a:lnSpc>
@@ -10089,11 +10794,43 @@
             <a:r>
               <a:rPr sz="1200" b="0" i="0">
                 <a:solidFill>
+                  <a:srgbClr val="8A7440"/>
+                </a:solidFill>
+                <a:latin typeface="JetBrains Mono"/>
+                <a:hlinkClick r:id="rId2"/>
+              </a:rPr>
+              <a:t>github.com/pnemrow/meridian-sentinel/tree/master/docs/walkthrough</a:t>
+            </a:r>
+          </a:p>
+          <a:p>
+            <a:pPr algn="l">
+              <a:lnSpc>
+                <a:spcPct val="110000"/>
+              </a:lnSpc>
+              <a:spcBef>
+                <a:spcPts val="0"/>
+              </a:spcBef>
+              <a:spcAft>
+                <a:spcPts val="1000"/>
+              </a:spcAft>
+            </a:pPr>
+            <a:r>
+              <a:rPr sz="1300" b="1" i="0">
+                <a:solidFill>
+                  <a:srgbClr val="C9A961"/>
+                </a:solidFill>
+                <a:latin typeface="Inter"/>
+              </a:rPr>
+              <a:t>Run it    </a:t>
+            </a:r>
+            <a:r>
+              <a:rPr sz="1200" b="0" i="0">
+                <a:solidFill>
                   <a:srgbClr val="94A3B8"/>
                 </a:solidFill>
                 <a:latin typeface="JetBrains Mono"/>
               </a:rPr>
-              <a:t>github.com/pnemrow/meridian-sentinel/tree/master/docs/walkthrough</a:t>
+              <a:t>git clone … &amp;&amp; docker compose up   →   localhost:8000/ui/</a:t>
             </a:r>
           </a:p>
           <a:p>
@@ -10115,45 +10852,15 @@
                 </a:solidFill>
                 <a:latin typeface="Inter"/>
               </a:rPr>
-              <a:t>Run it    </a:t>
+              <a:t>Repo    </a:t>
             </a:r>
             <a:r>
               <a:rPr sz="1200" b="0" i="0">
                 <a:solidFill>
-                  <a:srgbClr val="94A3B8"/>
+                  <a:srgbClr val="8A7440"/>
                 </a:solidFill>
                 <a:latin typeface="JetBrains Mono"/>
-              </a:rPr>
-              <a:t>git clone … &amp;&amp; docker compose up   →   localhost:8000/ui/</a:t>
-            </a:r>
-          </a:p>
-          <a:p>
-            <a:pPr algn="l">
-              <a:lnSpc>
-                <a:spcPct val="110000"/>
-              </a:lnSpc>
-              <a:spcBef>
-                <a:spcPts val="0"/>
-              </a:spcBef>
-              <a:spcAft>
-                <a:spcPts val="1000"/>
-              </a:spcAft>
-            </a:pPr>
-            <a:r>
-              <a:rPr sz="1300" b="1" i="0">
-                <a:solidFill>
-                  <a:srgbClr val="C9A961"/>
-                </a:solidFill>
-                <a:latin typeface="Inter"/>
-              </a:rPr>
-              <a:t>Repo    </a:t>
-            </a:r>
-            <a:r>
-              <a:rPr sz="1200" b="0" i="0">
-                <a:solidFill>
-                  <a:srgbClr val="94A3B8"/>
-                </a:solidFill>
-                <a:latin typeface="JetBrains Mono"/>
+                <a:hlinkClick r:id="rId3"/>
               </a:rPr>
               <a:t>github.com/pnemrow/meridian-sentinel</a:t>
             </a:r>
@@ -10190,7 +10897,7 @@
         </p:nvSpPr>
         <p:spPr>
           <a:xfrm>
-            <a:off x="868680" y="4754880"/>
+            <a:off x="868680" y="4709160"/>
             <a:ext cx="10424160" cy="822960"/>
           </a:xfrm>
           <a:prstGeom prst="rect">
@@ -10257,7 +10964,7 @@
         </p:nvSpPr>
         <p:spPr>
           <a:xfrm>
-            <a:off x="868680" y="5897880"/>
+            <a:off x="868680" y="5870448"/>
             <a:ext cx="10424160" cy="640080"/>
           </a:xfrm>
           <a:prstGeom prst="rect">
@@ -10508,11 +11215,11 @@
         <p:spPr>
           <a:xfrm>
             <a:off x="777240" y="2487168"/>
-            <a:ext cx="3419856" cy="3749039"/>
+            <a:ext cx="3419856" cy="3611880"/>
           </a:xfrm>
           <a:prstGeom prst="roundRect">
             <a:avLst>
-              <a:gd name="adj" fmla="val 6000"/>
+              <a:gd name="adj" fmla="val 5500"/>
             </a:avLst>
           </a:prstGeom>
           <a:solidFill>
@@ -10556,7 +11263,7 @@
         <p:spPr>
           <a:xfrm>
             <a:off x="777240" y="2487168"/>
-            <a:ext cx="54864" cy="3749039"/>
+            <a:ext cx="54864" cy="3611880"/>
           </a:xfrm>
           <a:prstGeom prst="rect">
             <a:avLst/>
@@ -10600,7 +11307,7 @@
         <p:spPr>
           <a:xfrm>
             <a:off x="1033271" y="2724912"/>
-            <a:ext cx="2962656" cy="3383280"/>
+            <a:ext cx="2962656" cy="3200400"/>
           </a:xfrm>
           <a:prstGeom prst="rect">
             <a:avLst/>
@@ -10769,11 +11476,11 @@
         <p:spPr>
           <a:xfrm>
             <a:off x="4453128" y="2487168"/>
-            <a:ext cx="3419856" cy="3749039"/>
+            <a:ext cx="3419856" cy="3611880"/>
           </a:xfrm>
           <a:prstGeom prst="roundRect">
             <a:avLst>
-              <a:gd name="adj" fmla="val 6000"/>
+              <a:gd name="adj" fmla="val 5500"/>
             </a:avLst>
           </a:prstGeom>
           <a:solidFill>
@@ -10817,7 +11524,7 @@
         <p:spPr>
           <a:xfrm>
             <a:off x="4453128" y="2487168"/>
-            <a:ext cx="54864" cy="3749039"/>
+            <a:ext cx="54864" cy="3611880"/>
           </a:xfrm>
           <a:prstGeom prst="rect">
             <a:avLst/>
@@ -10861,7 +11568,7 @@
         <p:spPr>
           <a:xfrm>
             <a:off x="4709160" y="2724912"/>
-            <a:ext cx="2962656" cy="3383280"/>
+            <a:ext cx="2962656" cy="3200400"/>
           </a:xfrm>
           <a:prstGeom prst="rect">
             <a:avLst/>
@@ -10985,7 +11692,7 @@
                 </a:solidFill>
                 <a:latin typeface="Inter"/>
               </a:rPr>
-              <a:t>FINMA 2025 enforcement against three Swiss houses</a:t>
+              <a:t>FINMA tightening enforcement on beneficial-ownership screening</a:t>
             </a:r>
           </a:p>
           <a:p>
@@ -11030,11 +11737,11 @@
         <p:spPr>
           <a:xfrm>
             <a:off x="8129016" y="2487168"/>
-            <a:ext cx="3419856" cy="3749039"/>
+            <a:ext cx="3419856" cy="3611880"/>
           </a:xfrm>
           <a:prstGeom prst="roundRect">
             <a:avLst>
-              <a:gd name="adj" fmla="val 6000"/>
+              <a:gd name="adj" fmla="val 5500"/>
             </a:avLst>
           </a:prstGeom>
           <a:solidFill>
@@ -11078,7 +11785,7 @@
         <p:spPr>
           <a:xfrm>
             <a:off x="8129016" y="2487168"/>
-            <a:ext cx="54864" cy="3749039"/>
+            <a:ext cx="54864" cy="3611880"/>
           </a:xfrm>
           <a:prstGeom prst="rect">
             <a:avLst/>
@@ -11122,7 +11829,7 @@
         <p:spPr>
           <a:xfrm>
             <a:off x="8385048" y="2724912"/>
-            <a:ext cx="2962656" cy="3383280"/>
+            <a:ext cx="2962656" cy="3200400"/>
           </a:xfrm>
           <a:prstGeom prst="rect">
             <a:avLst/>
@@ -11362,7 +12069,7 @@
                 </a:solidFill>
                 <a:latin typeface="Cormorant Garamond"/>
               </a:rPr>
-              <a:t>Eight days. </a:t>
+              <a:t>One platform, </a:t>
             </a:r>
             <a:r>
               <a:rPr sz="4000" b="0" i="1">
@@ -11371,7 +12078,7 @@
                 </a:solidFill>
                 <a:latin typeface="Cormorant Garamond"/>
               </a:rPr>
-              <a:t>One platform.</a:t>
+              <a:t>end to end.</a:t>
             </a:r>
           </a:p>
         </p:txBody>
@@ -11384,7 +12091,7 @@
         </p:nvSpPr>
         <p:spPr>
           <a:xfrm>
-            <a:off x="777240" y="1874519"/>
+            <a:off x="777240" y="1755648"/>
             <a:ext cx="10607040" cy="11887"/>
           </a:xfrm>
           <a:prstGeom prst="rect">
@@ -11428,12 +12135,12 @@
         </p:nvSpPr>
         <p:spPr>
           <a:xfrm>
-            <a:off x="777240" y="2139696"/>
-            <a:ext cx="3419856" cy="3611880"/>
+            <a:off x="777240" y="1956816"/>
+            <a:ext cx="3419856" cy="2706624"/>
           </a:xfrm>
           <a:prstGeom prst="roundRect">
             <a:avLst>
-              <a:gd name="adj" fmla="val 6000"/>
+              <a:gd name="adj" fmla="val 5500"/>
             </a:avLst>
           </a:prstGeom>
           <a:solidFill>
@@ -11470,14 +12177,102 @@
       </p:sp>
       <p:sp>
         <p:nvSpPr>
-          <p:cNvPr id="6" name="TextBox 5"/>
+          <p:cNvPr id="6" name="Hexagon 5"/>
+          <p:cNvSpPr/>
+          <p:nvPr/>
+        </p:nvSpPr>
+        <p:spPr>
+          <a:xfrm>
+            <a:off x="1051560" y="2184867"/>
+            <a:ext cx="384048" cy="330281"/>
+          </a:xfrm>
+          <a:prstGeom prst="hexagon">
+            <a:avLst/>
+          </a:prstGeom>
+          <a:noFill/>
+          <a:ln w="19050">
+            <a:solidFill>
+              <a:srgbClr val="C9A961"/>
+            </a:solidFill>
+          </a:ln>
+          <a:effectLst/>
+        </p:spPr>
+        <p:style>
+          <a:lnRef idx="1">
+            <a:schemeClr val="accent1"/>
+          </a:lnRef>
+          <a:fillRef idx="3">
+            <a:schemeClr val="accent1"/>
+          </a:fillRef>
+          <a:effectRef idx="2">
+            <a:schemeClr val="accent1"/>
+          </a:effectRef>
+          <a:fontRef idx="minor">
+            <a:schemeClr val="lt1"/>
+          </a:fontRef>
+        </p:style>
+        <p:txBody>
+          <a:bodyPr rtlCol="0" anchor="ctr"/>
+          <a:lstStyle/>
+          <a:p>
+            <a:pPr algn="ctr"/>
+          </a:p>
+        </p:txBody>
+      </p:sp>
+      <p:sp>
+        <p:nvSpPr>
+          <p:cNvPr id="7" name="Oval 6"/>
+          <p:cNvSpPr/>
+          <p:nvPr/>
+        </p:nvSpPr>
+        <p:spPr>
+          <a:xfrm>
+            <a:off x="1193657" y="2273198"/>
+            <a:ext cx="99852" cy="99852"/>
+          </a:xfrm>
+          <a:prstGeom prst="ellipse">
+            <a:avLst/>
+          </a:prstGeom>
+          <a:solidFill>
+            <a:srgbClr val="C9A961"/>
+          </a:solidFill>
+          <a:ln>
+            <a:noFill/>
+          </a:ln>
+          <a:effectLst/>
+        </p:spPr>
+        <p:style>
+          <a:lnRef idx="1">
+            <a:schemeClr val="accent1"/>
+          </a:lnRef>
+          <a:fillRef idx="3">
+            <a:schemeClr val="accent1"/>
+          </a:fillRef>
+          <a:effectRef idx="2">
+            <a:schemeClr val="accent1"/>
+          </a:effectRef>
+          <a:fontRef idx="minor">
+            <a:schemeClr val="lt1"/>
+          </a:fontRef>
+        </p:style>
+        <p:txBody>
+          <a:bodyPr rtlCol="0" anchor="ctr"/>
+          <a:lstStyle/>
+          <a:p>
+            <a:pPr algn="ctr"/>
+          </a:p>
+        </p:txBody>
+      </p:sp>
+      <p:sp>
+        <p:nvSpPr>
+          <p:cNvPr id="8" name="TextBox 7"/>
           <p:cNvSpPr txBox="1"/>
           <p:nvPr/>
         </p:nvSpPr>
         <p:spPr>
           <a:xfrm>
-            <a:off x="1033271" y="2340864"/>
-            <a:ext cx="2962656" cy="3200400"/>
+            <a:off x="1033271" y="2670048"/>
+            <a:ext cx="2962656" cy="1746504"/>
           </a:xfrm>
           <a:prstGeom prst="rect">
             <a:avLst/>
@@ -11498,11 +12293,11 @@
                 <a:spcPts val="0"/>
               </a:spcBef>
               <a:spcAft>
-                <a:spcPts val="1100"/>
-              </a:spcAft>
-            </a:pPr>
-            <a:r>
-              <a:rPr sz="2100" b="0" i="0">
+                <a:spcPts val="800"/>
+              </a:spcAft>
+            </a:pPr>
+            <a:r>
+              <a:rPr sz="2000" b="0" i="0">
                 <a:solidFill>
                   <a:srgbClr val="C9A961"/>
                 </a:solidFill>
@@ -11520,7 +12315,7 @@
                 <a:spcPts val="0"/>
               </a:spcBef>
               <a:spcAft>
-                <a:spcPts val="800"/>
+                <a:spcPts val="700"/>
               </a:spcAft>
             </a:pPr>
             <a:r>
@@ -11539,7 +12334,7 @@
                 </a:solidFill>
                 <a:latin typeface="Inter"/>
               </a:rPr>
-              <a:t>Resolves vendor name → entity → ownership graph → OFAC screen → audit briefing</a:t>
+              <a:t>Resolves vendor name → entity → ownership graph → OFAC screen → briefing</a:t>
             </a:r>
           </a:p>
           <a:p>
@@ -11551,7 +12346,7 @@
                 <a:spcPts val="0"/>
               </a:spcBef>
               <a:spcAft>
-                <a:spcPts val="800"/>
+                <a:spcPts val="700"/>
               </a:spcAft>
             </a:pPr>
             <a:r>
@@ -11573,49 +12368,18 @@
               <a:t>No LLM in the data path — every number traces to a Sayari field on disk</a:t>
             </a:r>
           </a:p>
-          <a:p>
-            <a:pPr algn="l">
-              <a:lnSpc>
-                <a:spcPct val="112000"/>
-              </a:lnSpc>
-              <a:spcBef>
-                <a:spcPts val="0"/>
-              </a:spcBef>
-              <a:spcAft>
-                <a:spcPts val="800"/>
-              </a:spcAft>
-            </a:pPr>
-            <a:r>
-              <a:rPr sz="1150" b="0" i="0">
-                <a:solidFill>
-                  <a:srgbClr val="8A7440"/>
-                </a:solidFill>
-                <a:latin typeface="Inter"/>
-              </a:rPr>
-              <a:t>—  </a:t>
-            </a:r>
-            <a:r>
-              <a:rPr sz="1150" b="0" i="0">
-                <a:solidFill>
-                  <a:srgbClr val="94A3B8"/>
-                </a:solidFill>
-                <a:latin typeface="Inter"/>
-              </a:rPr>
-              <a:t>The trust architecture: the model narrates, it never produces a value</a:t>
-            </a:r>
-          </a:p>
-        </p:txBody>
-      </p:sp>
-      <p:sp>
-        <p:nvSpPr>
-          <p:cNvPr id="7" name="TextBox 6"/>
+        </p:txBody>
+      </p:sp>
+      <p:sp>
+        <p:nvSpPr>
+          <p:cNvPr id="9" name="TextBox 8"/>
           <p:cNvSpPr txBox="1"/>
           <p:nvPr/>
         </p:nvSpPr>
         <p:spPr>
           <a:xfrm>
-            <a:off x="1033271" y="5358384"/>
-            <a:ext cx="2962656" cy="320040"/>
+            <a:off x="1033271" y="4370831"/>
+            <a:ext cx="2962656" cy="274320"/>
           </a:xfrm>
           <a:prstGeom prst="rect">
             <a:avLst/>
@@ -11628,43 +12392,41 @@
           </a:bodyPr>
           <a:lstStyle/>
           <a:p>
-            <a:pPr algn="l">
-              <a:lnSpc>
-                <a:spcPct val="112000"/>
-              </a:lnSpc>
-              <a:spcBef>
-                <a:spcPts val="0"/>
-              </a:spcBef>
-              <a:spcAft>
-                <a:spcPts val="0"/>
-              </a:spcAft>
-            </a:pPr>
-            <a:r>
-              <a:rPr sz="800" b="0" i="0">
+            <a:pPr>
+              <a:lnSpc>
+                <a:spcPct val="105000"/>
+              </a:lnSpc>
+              <a:spcAft>
+                <a:spcPts val="200"/>
+              </a:spcAft>
+            </a:pPr>
+            <a:r>
+              <a:rPr sz="800">
                 <a:solidFill>
                   <a:srgbClr val="8A7440"/>
                 </a:solidFill>
                 <a:latin typeface="JetBrains Mono"/>
-              </a:rPr>
-              <a:t>packages/engine/  ·  services/api/tools/</a:t>
-            </a:r>
-          </a:p>
-        </p:txBody>
-      </p:sp>
-      <p:sp>
-        <p:nvSpPr>
-          <p:cNvPr id="8" name="Rounded Rectangle 7"/>
+                <a:hlinkClick r:id="rId2"/>
+              </a:rPr>
+              <a:t>packages/engine/profile.py:26-118</a:t>
+            </a:r>
+          </a:p>
+        </p:txBody>
+      </p:sp>
+      <p:sp>
+        <p:nvSpPr>
+          <p:cNvPr id="10" name="Rounded Rectangle 9"/>
           <p:cNvSpPr/>
           <p:nvPr/>
         </p:nvSpPr>
         <p:spPr>
           <a:xfrm>
-            <a:off x="4453128" y="2139696"/>
-            <a:ext cx="3419856" cy="3611880"/>
+            <a:off x="4453128" y="1956816"/>
+            <a:ext cx="3419856" cy="2706624"/>
           </a:xfrm>
           <a:prstGeom prst="roundRect">
             <a:avLst>
-              <a:gd name="adj" fmla="val 6000"/>
+              <a:gd name="adj" fmla="val 5500"/>
             </a:avLst>
           </a:prstGeom>
           <a:solidFill>
@@ -11701,14 +12463,192 @@
       </p:sp>
       <p:sp>
         <p:nvSpPr>
-          <p:cNvPr id="9" name="TextBox 8"/>
+          <p:cNvPr id="11" name="Rounded Rectangle 10"/>
+          <p:cNvSpPr/>
+          <p:nvPr/>
+        </p:nvSpPr>
+        <p:spPr>
+          <a:xfrm>
+            <a:off x="4727448" y="2157984"/>
+            <a:ext cx="384048" cy="284195"/>
+          </a:xfrm>
+          <a:prstGeom prst="roundRect">
+            <a:avLst>
+              <a:gd name="adj" fmla="val 30000"/>
+            </a:avLst>
+          </a:prstGeom>
+          <a:noFill/>
+          <a:ln w="19050">
+            <a:solidFill>
+              <a:srgbClr val="C9A961"/>
+            </a:solidFill>
+          </a:ln>
+          <a:effectLst/>
+        </p:spPr>
+        <p:style>
+          <a:lnRef idx="1">
+            <a:schemeClr val="accent1"/>
+          </a:lnRef>
+          <a:fillRef idx="3">
+            <a:schemeClr val="accent1"/>
+          </a:fillRef>
+          <a:effectRef idx="2">
+            <a:schemeClr val="accent1"/>
+          </a:effectRef>
+          <a:fontRef idx="minor">
+            <a:schemeClr val="lt1"/>
+          </a:fontRef>
+        </p:style>
+        <p:txBody>
+          <a:bodyPr rtlCol="0" anchor="ctr"/>
+          <a:lstStyle/>
+          <a:p>
+            <a:pPr algn="ctr"/>
+          </a:p>
+        </p:txBody>
+      </p:sp>
+      <p:sp>
+        <p:nvSpPr>
+          <p:cNvPr id="12" name="Oval 11"/>
+          <p:cNvSpPr/>
+          <p:nvPr/>
+        </p:nvSpPr>
+        <p:spPr>
+          <a:xfrm>
+            <a:off x="4804257" y="2273198"/>
+            <a:ext cx="46085" cy="46085"/>
+          </a:xfrm>
+          <a:prstGeom prst="ellipse">
+            <a:avLst/>
+          </a:prstGeom>
+          <a:solidFill>
+            <a:srgbClr val="C9A961"/>
+          </a:solidFill>
+          <a:ln>
+            <a:noFill/>
+          </a:ln>
+          <a:effectLst/>
+        </p:spPr>
+        <p:style>
+          <a:lnRef idx="1">
+            <a:schemeClr val="accent1"/>
+          </a:lnRef>
+          <a:fillRef idx="3">
+            <a:schemeClr val="accent1"/>
+          </a:fillRef>
+          <a:effectRef idx="2">
+            <a:schemeClr val="accent1"/>
+          </a:effectRef>
+          <a:fontRef idx="minor">
+            <a:schemeClr val="lt1"/>
+          </a:fontRef>
+        </p:style>
+        <p:txBody>
+          <a:bodyPr rtlCol="0" anchor="ctr"/>
+          <a:lstStyle/>
+          <a:p>
+            <a:pPr algn="ctr"/>
+          </a:p>
+        </p:txBody>
+      </p:sp>
+      <p:sp>
+        <p:nvSpPr>
+          <p:cNvPr id="13" name="Oval 12"/>
+          <p:cNvSpPr/>
+          <p:nvPr/>
+        </p:nvSpPr>
+        <p:spPr>
+          <a:xfrm>
+            <a:off x="4888748" y="2273198"/>
+            <a:ext cx="46085" cy="46085"/>
+          </a:xfrm>
+          <a:prstGeom prst="ellipse">
+            <a:avLst/>
+          </a:prstGeom>
+          <a:solidFill>
+            <a:srgbClr val="C9A961"/>
+          </a:solidFill>
+          <a:ln>
+            <a:noFill/>
+          </a:ln>
+          <a:effectLst/>
+        </p:spPr>
+        <p:style>
+          <a:lnRef idx="1">
+            <a:schemeClr val="accent1"/>
+          </a:lnRef>
+          <a:fillRef idx="3">
+            <a:schemeClr val="accent1"/>
+          </a:fillRef>
+          <a:effectRef idx="2">
+            <a:schemeClr val="accent1"/>
+          </a:effectRef>
+          <a:fontRef idx="minor">
+            <a:schemeClr val="lt1"/>
+          </a:fontRef>
+        </p:style>
+        <p:txBody>
+          <a:bodyPr rtlCol="0" anchor="ctr"/>
+          <a:lstStyle/>
+          <a:p>
+            <a:pPr algn="ctr"/>
+          </a:p>
+        </p:txBody>
+      </p:sp>
+      <p:sp>
+        <p:nvSpPr>
+          <p:cNvPr id="14" name="Oval 13"/>
+          <p:cNvSpPr/>
+          <p:nvPr/>
+        </p:nvSpPr>
+        <p:spPr>
+          <a:xfrm>
+            <a:off x="4973238" y="2273198"/>
+            <a:ext cx="46085" cy="46085"/>
+          </a:xfrm>
+          <a:prstGeom prst="ellipse">
+            <a:avLst/>
+          </a:prstGeom>
+          <a:solidFill>
+            <a:srgbClr val="C9A961"/>
+          </a:solidFill>
+          <a:ln>
+            <a:noFill/>
+          </a:ln>
+          <a:effectLst/>
+        </p:spPr>
+        <p:style>
+          <a:lnRef idx="1">
+            <a:schemeClr val="accent1"/>
+          </a:lnRef>
+          <a:fillRef idx="3">
+            <a:schemeClr val="accent1"/>
+          </a:fillRef>
+          <a:effectRef idx="2">
+            <a:schemeClr val="accent1"/>
+          </a:effectRef>
+          <a:fontRef idx="minor">
+            <a:schemeClr val="lt1"/>
+          </a:fontRef>
+        </p:style>
+        <p:txBody>
+          <a:bodyPr rtlCol="0" anchor="ctr"/>
+          <a:lstStyle/>
+          <a:p>
+            <a:pPr algn="ctr"/>
+          </a:p>
+        </p:txBody>
+      </p:sp>
+      <p:sp>
+        <p:nvSpPr>
+          <p:cNvPr id="15" name="TextBox 14"/>
           <p:cNvSpPr txBox="1"/>
           <p:nvPr/>
         </p:nvSpPr>
         <p:spPr>
           <a:xfrm>
-            <a:off x="4709160" y="2340864"/>
-            <a:ext cx="2962656" cy="3200400"/>
+            <a:off x="4709160" y="2670048"/>
+            <a:ext cx="2962656" cy="1746504"/>
           </a:xfrm>
           <a:prstGeom prst="rect">
             <a:avLst/>
@@ -11729,11 +12669,11 @@
                 <a:spcPts val="0"/>
               </a:spcBef>
               <a:spcAft>
-                <a:spcPts val="1100"/>
-              </a:spcAft>
-            </a:pPr>
-            <a:r>
-              <a:rPr sz="2100" b="0" i="0">
+                <a:spcPts val="800"/>
+              </a:spcAft>
+            </a:pPr>
+            <a:r>
+              <a:rPr sz="2000" b="0" i="0">
                 <a:solidFill>
                   <a:srgbClr val="C9A961"/>
                 </a:solidFill>
@@ -11751,7 +12691,7 @@
                 <a:spcPts val="0"/>
               </a:spcBef>
               <a:spcAft>
-                <a:spcPts val="800"/>
+                <a:spcPts val="700"/>
               </a:spcAft>
             </a:pPr>
             <a:r>
@@ -11782,7 +12722,7 @@
                 <a:spcPts val="0"/>
               </a:spcBef>
               <a:spcAft>
-                <a:spcPts val="800"/>
+                <a:spcPts val="700"/>
               </a:spcAft>
             </a:pPr>
             <a:r>
@@ -11801,52 +12741,21 @@
                 </a:solidFill>
                 <a:latin typeface="Inter"/>
               </a:rPr>
-              <a:t>Cites every claim; the system prompt forbids fabrication</a:t>
-            </a:r>
-          </a:p>
-          <a:p>
-            <a:pPr algn="l">
-              <a:lnSpc>
-                <a:spcPct val="112000"/>
-              </a:lnSpc>
-              <a:spcBef>
-                <a:spcPts val="0"/>
-              </a:spcBef>
-              <a:spcAft>
-                <a:spcPts val="800"/>
-              </a:spcAft>
-            </a:pPr>
-            <a:r>
-              <a:rPr sz="1150" b="0" i="0">
-                <a:solidFill>
-                  <a:srgbClr val="8A7440"/>
-                </a:solidFill>
-                <a:latin typeface="Inter"/>
-              </a:rPr>
-              <a:t>—  </a:t>
-            </a:r>
-            <a:r>
-              <a:rPr sz="1150" b="0" i="0">
-                <a:solidFill>
-                  <a:srgbClr val="94A3B8"/>
-                </a:solidFill>
-                <a:latin typeface="Inter"/>
-              </a:rPr>
-              <a:t>CACHED mode replays four real captured runs — zero API cost to demo</a:t>
-            </a:r>
-          </a:p>
-        </p:txBody>
-      </p:sp>
-      <p:sp>
-        <p:nvSpPr>
-          <p:cNvPr id="10" name="TextBox 9"/>
+              <a:t>Cites every claim; CACHED replays four real runs at zero API cost</a:t>
+            </a:r>
+          </a:p>
+        </p:txBody>
+      </p:sp>
+      <p:sp>
+        <p:nvSpPr>
+          <p:cNvPr id="16" name="TextBox 15"/>
           <p:cNvSpPr txBox="1"/>
           <p:nvPr/>
         </p:nvSpPr>
         <p:spPr>
           <a:xfrm>
-            <a:off x="4709160" y="5358384"/>
-            <a:ext cx="2962656" cy="320040"/>
+            <a:off x="4709160" y="4370831"/>
+            <a:ext cx="2962656" cy="274320"/>
           </a:xfrm>
           <a:prstGeom prst="rect">
             <a:avLst/>
@@ -11859,23 +12768,21 @@
           </a:bodyPr>
           <a:lstStyle/>
           <a:p>
-            <a:pPr algn="l">
-              <a:lnSpc>
-                <a:spcPct val="112000"/>
-              </a:lnSpc>
-              <a:spcBef>
-                <a:spcPts val="0"/>
-              </a:spcBef>
-              <a:spcAft>
-                <a:spcPts val="0"/>
-              </a:spcAft>
-            </a:pPr>
-            <a:r>
-              <a:rPr sz="800" b="0" i="0">
+            <a:pPr>
+              <a:lnSpc>
+                <a:spcPct val="105000"/>
+              </a:lnSpc>
+              <a:spcAft>
+                <a:spcPts val="200"/>
+              </a:spcAft>
+            </a:pPr>
+            <a:r>
+              <a:rPr sz="800">
                 <a:solidFill>
                   <a:srgbClr val="8A7440"/>
                 </a:solidFill>
                 <a:latin typeface="JetBrains Mono"/>
+                <a:hlinkClick r:id="rId3"/>
               </a:rPr>
               <a:t>services/api/agent/runner.py</a:t>
             </a:r>
@@ -11884,18 +12791,18 @@
       </p:sp>
       <p:sp>
         <p:nvSpPr>
-          <p:cNvPr id="11" name="Rounded Rectangle 10"/>
+          <p:cNvPr id="17" name="Rounded Rectangle 16"/>
           <p:cNvSpPr/>
           <p:nvPr/>
         </p:nvSpPr>
         <p:spPr>
           <a:xfrm>
-            <a:off x="8129016" y="2139696"/>
-            <a:ext cx="3419856" cy="3611880"/>
+            <a:off x="8129016" y="1956816"/>
+            <a:ext cx="3419856" cy="2706624"/>
           </a:xfrm>
           <a:prstGeom prst="roundRect">
             <a:avLst>
-              <a:gd name="adj" fmla="val 6000"/>
+              <a:gd name="adj" fmla="val 5500"/>
             </a:avLst>
           </a:prstGeom>
           <a:solidFill>
@@ -11930,16 +12837,226 @@
           </a:p>
         </p:txBody>
       </p:sp>
-      <p:sp>
-        <p:nvSpPr>
-          <p:cNvPr id="12" name="TextBox 11"/>
+      <p:cxnSp>
+        <p:nvCxnSpPr>
+          <p:cNvPr id="18" name="Connector 17"/>
+          <p:cNvCxnSpPr/>
+          <p:nvPr/>
+        </p:nvCxnSpPr>
+        <p:spPr>
+          <a:xfrm flipH="1">
+            <a:off x="8460943" y="2215591"/>
+            <a:ext cx="134417" cy="238109"/>
+          </a:xfrm>
+          <a:prstGeom prst="line">
+            <a:avLst/>
+          </a:prstGeom>
+          <a:ln w="15240">
+            <a:solidFill>
+              <a:srgbClr val="C9A961"/>
+            </a:solidFill>
+          </a:ln>
+          <a:effectLst/>
+        </p:spPr>
+        <p:style>
+          <a:lnRef idx="2">
+            <a:schemeClr val="accent1"/>
+          </a:lnRef>
+          <a:fillRef idx="0">
+            <a:schemeClr val="accent1"/>
+          </a:fillRef>
+          <a:effectRef idx="1">
+            <a:schemeClr val="accent1"/>
+          </a:effectRef>
+          <a:fontRef idx="minor">
+            <a:schemeClr val="tx1"/>
+          </a:fontRef>
+        </p:style>
+      </p:cxnSp>
+      <p:cxnSp>
+        <p:nvCxnSpPr>
+          <p:cNvPr id="19" name="Connector 18"/>
+          <p:cNvCxnSpPr/>
+          <p:nvPr/>
+        </p:nvCxnSpPr>
+        <p:spPr>
+          <a:xfrm>
+            <a:off x="8595360" y="2215591"/>
+            <a:ext cx="134416" cy="238109"/>
+          </a:xfrm>
+          <a:prstGeom prst="line">
+            <a:avLst/>
+          </a:prstGeom>
+          <a:ln w="15240">
+            <a:solidFill>
+              <a:srgbClr val="C9A961"/>
+            </a:solidFill>
+          </a:ln>
+          <a:effectLst/>
+        </p:spPr>
+        <p:style>
+          <a:lnRef idx="2">
+            <a:schemeClr val="accent1"/>
+          </a:lnRef>
+          <a:fillRef idx="0">
+            <a:schemeClr val="accent1"/>
+          </a:fillRef>
+          <a:effectRef idx="1">
+            <a:schemeClr val="accent1"/>
+          </a:effectRef>
+          <a:fontRef idx="minor">
+            <a:schemeClr val="tx1"/>
+          </a:fontRef>
+        </p:style>
+      </p:cxnSp>
+      <p:sp>
+        <p:nvSpPr>
+          <p:cNvPr id="20" name="Oval 19"/>
+          <p:cNvSpPr/>
+          <p:nvPr/>
+        </p:nvSpPr>
+        <p:spPr>
+          <a:xfrm>
+            <a:off x="8537752" y="2157984"/>
+            <a:ext cx="115214" cy="115214"/>
+          </a:xfrm>
+          <a:prstGeom prst="ellipse">
+            <a:avLst/>
+          </a:prstGeom>
+          <a:solidFill>
+            <a:srgbClr val="0A1628"/>
+          </a:solidFill>
+          <a:ln w="16510">
+            <a:solidFill>
+              <a:srgbClr val="C9A961"/>
+            </a:solidFill>
+          </a:ln>
+          <a:effectLst/>
+        </p:spPr>
+        <p:style>
+          <a:lnRef idx="1">
+            <a:schemeClr val="accent1"/>
+          </a:lnRef>
+          <a:fillRef idx="3">
+            <a:schemeClr val="accent1"/>
+          </a:fillRef>
+          <a:effectRef idx="2">
+            <a:schemeClr val="accent1"/>
+          </a:effectRef>
+          <a:fontRef idx="minor">
+            <a:schemeClr val="lt1"/>
+          </a:fontRef>
+        </p:style>
+        <p:txBody>
+          <a:bodyPr rtlCol="0" anchor="ctr"/>
+          <a:lstStyle/>
+          <a:p>
+            <a:pPr algn="ctr"/>
+          </a:p>
+        </p:txBody>
+      </p:sp>
+      <p:sp>
+        <p:nvSpPr>
+          <p:cNvPr id="21" name="Oval 20"/>
+          <p:cNvSpPr/>
+          <p:nvPr/>
+        </p:nvSpPr>
+        <p:spPr>
+          <a:xfrm>
+            <a:off x="8403336" y="2396093"/>
+            <a:ext cx="115214" cy="115214"/>
+          </a:xfrm>
+          <a:prstGeom prst="ellipse">
+            <a:avLst/>
+          </a:prstGeom>
+          <a:solidFill>
+            <a:srgbClr val="0A1628"/>
+          </a:solidFill>
+          <a:ln w="16510">
+            <a:solidFill>
+              <a:srgbClr val="C9A961"/>
+            </a:solidFill>
+          </a:ln>
+          <a:effectLst/>
+        </p:spPr>
+        <p:style>
+          <a:lnRef idx="1">
+            <a:schemeClr val="accent1"/>
+          </a:lnRef>
+          <a:fillRef idx="3">
+            <a:schemeClr val="accent1"/>
+          </a:fillRef>
+          <a:effectRef idx="2">
+            <a:schemeClr val="accent1"/>
+          </a:effectRef>
+          <a:fontRef idx="minor">
+            <a:schemeClr val="lt1"/>
+          </a:fontRef>
+        </p:style>
+        <p:txBody>
+          <a:bodyPr rtlCol="0" anchor="ctr"/>
+          <a:lstStyle/>
+          <a:p>
+            <a:pPr algn="ctr"/>
+          </a:p>
+        </p:txBody>
+      </p:sp>
+      <p:sp>
+        <p:nvSpPr>
+          <p:cNvPr id="22" name="Oval 21"/>
+          <p:cNvSpPr/>
+          <p:nvPr/>
+        </p:nvSpPr>
+        <p:spPr>
+          <a:xfrm>
+            <a:off x="8672169" y="2396093"/>
+            <a:ext cx="115214" cy="115214"/>
+          </a:xfrm>
+          <a:prstGeom prst="ellipse">
+            <a:avLst/>
+          </a:prstGeom>
+          <a:solidFill>
+            <a:srgbClr val="0A1628"/>
+          </a:solidFill>
+          <a:ln w="16510">
+            <a:solidFill>
+              <a:srgbClr val="C9A961"/>
+            </a:solidFill>
+          </a:ln>
+          <a:effectLst/>
+        </p:spPr>
+        <p:style>
+          <a:lnRef idx="1">
+            <a:schemeClr val="accent1"/>
+          </a:lnRef>
+          <a:fillRef idx="3">
+            <a:schemeClr val="accent1"/>
+          </a:fillRef>
+          <a:effectRef idx="2">
+            <a:schemeClr val="accent1"/>
+          </a:effectRef>
+          <a:fontRef idx="minor">
+            <a:schemeClr val="lt1"/>
+          </a:fontRef>
+        </p:style>
+        <p:txBody>
+          <a:bodyPr rtlCol="0" anchor="ctr"/>
+          <a:lstStyle/>
+          <a:p>
+            <a:pPr algn="ctr"/>
+          </a:p>
+        </p:txBody>
+      </p:sp>
+      <p:sp>
+        <p:nvSpPr>
+          <p:cNvPr id="23" name="TextBox 22"/>
           <p:cNvSpPr txBox="1"/>
           <p:nvPr/>
         </p:nvSpPr>
         <p:spPr>
           <a:xfrm>
-            <a:off x="8385048" y="2340864"/>
-            <a:ext cx="2962656" cy="3200400"/>
+            <a:off x="8385048" y="2670048"/>
+            <a:ext cx="2962656" cy="1746504"/>
           </a:xfrm>
           <a:prstGeom prst="rect">
             <a:avLst/>
@@ -11960,11 +13077,11 @@
                 <a:spcPts val="0"/>
               </a:spcBef>
               <a:spcAft>
-                <a:spcPts val="1100"/>
-              </a:spcAft>
-            </a:pPr>
-            <a:r>
-              <a:rPr sz="2100" b="0" i="0">
+                <a:spcPts val="800"/>
+              </a:spcAft>
+            </a:pPr>
+            <a:r>
+              <a:rPr sz="2000" b="0" i="0">
                 <a:solidFill>
                   <a:srgbClr val="C9A961"/>
                 </a:solidFill>
@@ -11982,7 +13099,7 @@
                 <a:spcPts val="0"/>
               </a:spcBef>
               <a:spcAft>
-                <a:spcPts val="800"/>
+                <a:spcPts val="700"/>
               </a:spcAft>
             </a:pPr>
             <a:r>
@@ -12001,7 +13118,7 @@
                 </a:solidFill>
                 <a:latin typeface="Inter"/>
               </a:rPr>
-              <a:t>Six capabilities exposed over the Model Context Protocol</a:t>
+              <a:t>Six capabilities over the Model Context Protocol</a:t>
             </a:r>
           </a:p>
           <a:p>
@@ -12013,7 +13130,7 @@
                 <a:spcPts val="0"/>
               </a:spcBef>
               <a:spcAft>
-                <a:spcPts val="800"/>
+                <a:spcPts val="700"/>
               </a:spcAft>
             </a:pPr>
             <a:r>
@@ -12035,49 +13152,18 @@
               <a:t>Direct engine import — callable from Claude Desktop or any MCP client</a:t>
             </a:r>
           </a:p>
-          <a:p>
-            <a:pPr algn="l">
-              <a:lnSpc>
-                <a:spcPct val="112000"/>
-              </a:lnSpc>
-              <a:spcBef>
-                <a:spcPts val="0"/>
-              </a:spcBef>
-              <a:spcAft>
-                <a:spcPts val="800"/>
-              </a:spcAft>
-            </a:pPr>
-            <a:r>
-              <a:rPr sz="1150" b="0" i="0">
-                <a:solidFill>
-                  <a:srgbClr val="8A7440"/>
-                </a:solidFill>
-                <a:latin typeface="Inter"/>
-              </a:rPr>
-              <a:t>—  </a:t>
-            </a:r>
-            <a:r>
-              <a:rPr sz="1150" b="0" i="0">
-                <a:solidFill>
-                  <a:srgbClr val="94A3B8"/>
-                </a:solidFill>
-                <a:latin typeface="Inter"/>
-              </a:rPr>
-              <a:t>Platform thinking: the same engine serves humans and agents</a:t>
-            </a:r>
-          </a:p>
-        </p:txBody>
-      </p:sp>
-      <p:sp>
-        <p:nvSpPr>
-          <p:cNvPr id="13" name="TextBox 12"/>
+        </p:txBody>
+      </p:sp>
+      <p:sp>
+        <p:nvSpPr>
+          <p:cNvPr id="24" name="TextBox 23"/>
           <p:cNvSpPr txBox="1"/>
           <p:nvPr/>
         </p:nvSpPr>
         <p:spPr>
           <a:xfrm>
-            <a:off x="8385048" y="5358384"/>
-            <a:ext cx="2962656" cy="320040"/>
+            <a:off x="8385048" y="4370831"/>
+            <a:ext cx="2962656" cy="274320"/>
           </a:xfrm>
           <a:prstGeom prst="rect">
             <a:avLst/>
@@ -12090,6 +13176,49 @@
           </a:bodyPr>
           <a:lstStyle/>
           <a:p>
+            <a:pPr>
+              <a:lnSpc>
+                <a:spcPct val="105000"/>
+              </a:lnSpc>
+              <a:spcAft>
+                <a:spcPts val="200"/>
+              </a:spcAft>
+            </a:pPr>
+            <a:r>
+              <a:rPr sz="800">
+                <a:solidFill>
+                  <a:srgbClr val="8A7440"/>
+                </a:solidFill>
+                <a:latin typeface="JetBrains Mono"/>
+                <a:hlinkClick r:id="rId4"/>
+              </a:rPr>
+              <a:t>services/mcp/server.py:305-333</a:t>
+            </a:r>
+          </a:p>
+        </p:txBody>
+      </p:sp>
+      <p:sp>
+        <p:nvSpPr>
+          <p:cNvPr id="25" name="TextBox 24"/>
+          <p:cNvSpPr txBox="1"/>
+          <p:nvPr/>
+        </p:nvSpPr>
+        <p:spPr>
+          <a:xfrm>
+            <a:off x="777240" y="4956048"/>
+            <a:ext cx="10625328" cy="274320"/>
+          </a:xfrm>
+          <a:prstGeom prst="rect">
+            <a:avLst/>
+          </a:prstGeom>
+          <a:noFill/>
+        </p:spPr>
+        <p:txBody>
+          <a:bodyPr wrap="square" anchor="t" lIns="0" rIns="0" tIns="0" bIns="0">
+            <a:spAutoFit/>
+          </a:bodyPr>
+          <a:lstStyle/>
+          <a:p>
             <a:pPr algn="l">
               <a:lnSpc>
                 <a:spcPct val="112000"/>
@@ -12102,31 +13231,388 @@
               </a:spcAft>
             </a:pPr>
             <a:r>
-              <a:rPr sz="800" b="0" i="0">
-                <a:solidFill>
-                  <a:srgbClr val="8A7440"/>
-                </a:solidFill>
-                <a:latin typeface="JetBrains Mono"/>
-              </a:rPr>
-              <a:t>services/mcp/server.py</a:t>
-            </a:r>
-          </a:p>
-        </p:txBody>
-      </p:sp>
-      <p:sp>
-        <p:nvSpPr>
-          <p:cNvPr id="14" name="Rounded Rectangle 13"/>
+              <a:rPr sz="1000" b="1" i="0" spc="160">
+                <a:solidFill>
+                  <a:srgbClr val="C9A961"/>
+                </a:solidFill>
+                <a:latin typeface="Inter"/>
+              </a:rPr>
+              <a:t>THE FINDING — 40 OF 50 SCREENED ARE OFAC-EXPOSED</a:t>
+            </a:r>
+          </a:p>
+        </p:txBody>
+      </p:sp>
+      <p:sp>
+        <p:nvSpPr>
+          <p:cNvPr id="26" name="Rectangle 25"/>
           <p:cNvSpPr/>
           <p:nvPr/>
         </p:nvSpPr>
         <p:spPr>
           <a:xfrm>
-            <a:off x="777240" y="5961888"/>
-            <a:ext cx="10625328" cy="566928"/>
+            <a:off x="777240" y="5266944"/>
+            <a:ext cx="8765895" cy="384048"/>
+          </a:xfrm>
+          <a:prstGeom prst="rect">
+            <a:avLst/>
+          </a:prstGeom>
+          <a:solidFill>
+            <a:srgbClr val="C9A961"/>
+          </a:solidFill>
+          <a:ln>
+            <a:noFill/>
+          </a:ln>
+          <a:effectLst/>
+        </p:spPr>
+        <p:style>
+          <a:lnRef idx="1">
+            <a:schemeClr val="accent1"/>
+          </a:lnRef>
+          <a:fillRef idx="3">
+            <a:schemeClr val="accent1"/>
+          </a:fillRef>
+          <a:effectRef idx="2">
+            <a:schemeClr val="accent1"/>
+          </a:effectRef>
+          <a:fontRef idx="minor">
+            <a:schemeClr val="lt1"/>
+          </a:fontRef>
+        </p:style>
+        <p:txBody>
+          <a:bodyPr rtlCol="0" anchor="ctr"/>
+          <a:lstStyle/>
+          <a:p>
+            <a:pPr algn="ctr"/>
+          </a:p>
+        </p:txBody>
+      </p:sp>
+      <p:sp>
+        <p:nvSpPr>
+          <p:cNvPr id="27" name="TextBox 26"/>
+          <p:cNvSpPr txBox="1"/>
+          <p:nvPr/>
+        </p:nvSpPr>
+        <p:spPr>
+          <a:xfrm>
+            <a:off x="777240" y="5266944"/>
+            <a:ext cx="8765895" cy="384048"/>
+          </a:xfrm>
+          <a:prstGeom prst="rect">
+            <a:avLst/>
+          </a:prstGeom>
+          <a:noFill/>
+        </p:spPr>
+        <p:txBody>
+          <a:bodyPr wrap="square" anchor="ctr" lIns="0" rIns="0" tIns="0" bIns="0">
+            <a:spAutoFit/>
+          </a:bodyPr>
+          <a:lstStyle/>
+          <a:p>
+            <a:pPr algn="ctr">
+              <a:lnSpc>
+                <a:spcPct val="112000"/>
+              </a:lnSpc>
+              <a:spcBef>
+                <a:spcPts val="0"/>
+              </a:spcBef>
+              <a:spcAft>
+                <a:spcPts val="0"/>
+              </a:spcAft>
+            </a:pPr>
+            <a:r>
+              <a:rPr sz="1500" b="1" i="0">
+                <a:solidFill>
+                  <a:srgbClr val="0A1628"/>
+                </a:solidFill>
+                <a:latin typeface="Inter"/>
+              </a:rPr>
+              <a:t>33</a:t>
+            </a:r>
+          </a:p>
+        </p:txBody>
+      </p:sp>
+      <p:sp>
+        <p:nvSpPr>
+          <p:cNvPr id="28" name="Rectangle 27"/>
+          <p:cNvSpPr/>
+          <p:nvPr/>
+        </p:nvSpPr>
+        <p:spPr>
+          <a:xfrm>
+            <a:off x="9543135" y="5266944"/>
+            <a:ext cx="1062532" cy="384048"/>
+          </a:xfrm>
+          <a:prstGeom prst="rect">
+            <a:avLst/>
+          </a:prstGeom>
+          <a:solidFill>
+            <a:srgbClr val="F85149"/>
+          </a:solidFill>
+          <a:ln>
+            <a:noFill/>
+          </a:ln>
+          <a:effectLst/>
+        </p:spPr>
+        <p:style>
+          <a:lnRef idx="1">
+            <a:schemeClr val="accent1"/>
+          </a:lnRef>
+          <a:fillRef idx="3">
+            <a:schemeClr val="accent1"/>
+          </a:fillRef>
+          <a:effectRef idx="2">
+            <a:schemeClr val="accent1"/>
+          </a:effectRef>
+          <a:fontRef idx="minor">
+            <a:schemeClr val="lt1"/>
+          </a:fontRef>
+        </p:style>
+        <p:txBody>
+          <a:bodyPr rtlCol="0" anchor="ctr"/>
+          <a:lstStyle/>
+          <a:p>
+            <a:pPr algn="ctr"/>
+          </a:p>
+        </p:txBody>
+      </p:sp>
+      <p:sp>
+        <p:nvSpPr>
+          <p:cNvPr id="29" name="TextBox 28"/>
+          <p:cNvSpPr txBox="1"/>
+          <p:nvPr/>
+        </p:nvSpPr>
+        <p:spPr>
+          <a:xfrm>
+            <a:off x="9543135" y="5266944"/>
+            <a:ext cx="1062532" cy="384048"/>
+          </a:xfrm>
+          <a:prstGeom prst="rect">
+            <a:avLst/>
+          </a:prstGeom>
+          <a:noFill/>
+        </p:spPr>
+        <p:txBody>
+          <a:bodyPr wrap="square" anchor="ctr" lIns="0" rIns="0" tIns="0" bIns="0">
+            <a:spAutoFit/>
+          </a:bodyPr>
+          <a:lstStyle/>
+          <a:p>
+            <a:pPr algn="ctr">
+              <a:lnSpc>
+                <a:spcPct val="112000"/>
+              </a:lnSpc>
+              <a:spcBef>
+                <a:spcPts val="0"/>
+              </a:spcBef>
+              <a:spcAft>
+                <a:spcPts val="0"/>
+              </a:spcAft>
+            </a:pPr>
+            <a:r>
+              <a:rPr sz="1500" b="1" i="0">
+                <a:solidFill>
+                  <a:srgbClr val="0A1628"/>
+                </a:solidFill>
+                <a:latin typeface="Inter"/>
+              </a:rPr>
+              <a:t>4</a:t>
+            </a:r>
+          </a:p>
+        </p:txBody>
+      </p:sp>
+      <p:sp>
+        <p:nvSpPr>
+          <p:cNvPr id="30" name="Rectangle 29"/>
+          <p:cNvSpPr/>
+          <p:nvPr/>
+        </p:nvSpPr>
+        <p:spPr>
+          <a:xfrm>
+            <a:off x="10605668" y="5266944"/>
+            <a:ext cx="796899" cy="384048"/>
+          </a:xfrm>
+          <a:prstGeom prst="rect">
+            <a:avLst/>
+          </a:prstGeom>
+          <a:solidFill>
+            <a:srgbClr val="DB6D28"/>
+          </a:solidFill>
+          <a:ln>
+            <a:noFill/>
+          </a:ln>
+          <a:effectLst/>
+        </p:spPr>
+        <p:style>
+          <a:lnRef idx="1">
+            <a:schemeClr val="accent1"/>
+          </a:lnRef>
+          <a:fillRef idx="3">
+            <a:schemeClr val="accent1"/>
+          </a:fillRef>
+          <a:effectRef idx="2">
+            <a:schemeClr val="accent1"/>
+          </a:effectRef>
+          <a:fontRef idx="minor">
+            <a:schemeClr val="lt1"/>
+          </a:fontRef>
+        </p:style>
+        <p:txBody>
+          <a:bodyPr rtlCol="0" anchor="ctr"/>
+          <a:lstStyle/>
+          <a:p>
+            <a:pPr algn="ctr"/>
+          </a:p>
+        </p:txBody>
+      </p:sp>
+      <p:sp>
+        <p:nvSpPr>
+          <p:cNvPr id="31" name="TextBox 30"/>
+          <p:cNvSpPr txBox="1"/>
+          <p:nvPr/>
+        </p:nvSpPr>
+        <p:spPr>
+          <a:xfrm>
+            <a:off x="10605668" y="5266944"/>
+            <a:ext cx="796899" cy="384048"/>
+          </a:xfrm>
+          <a:prstGeom prst="rect">
+            <a:avLst/>
+          </a:prstGeom>
+          <a:noFill/>
+        </p:spPr>
+        <p:txBody>
+          <a:bodyPr wrap="square" anchor="ctr" lIns="0" rIns="0" tIns="0" bIns="0">
+            <a:spAutoFit/>
+          </a:bodyPr>
+          <a:lstStyle/>
+          <a:p>
+            <a:pPr algn="ctr">
+              <a:lnSpc>
+                <a:spcPct val="112000"/>
+              </a:lnSpc>
+              <a:spcBef>
+                <a:spcPts val="0"/>
+              </a:spcBef>
+              <a:spcAft>
+                <a:spcPts val="0"/>
+              </a:spcAft>
+            </a:pPr>
+            <a:r>
+              <a:rPr sz="1500" b="1" i="0">
+                <a:solidFill>
+                  <a:srgbClr val="0A1628"/>
+                </a:solidFill>
+                <a:latin typeface="Inter"/>
+              </a:rPr>
+              <a:t>3</a:t>
+            </a:r>
+          </a:p>
+        </p:txBody>
+      </p:sp>
+      <p:sp>
+        <p:nvSpPr>
+          <p:cNvPr id="32" name="TextBox 31"/>
+          <p:cNvSpPr txBox="1"/>
+          <p:nvPr/>
+        </p:nvSpPr>
+        <p:spPr>
+          <a:xfrm>
+            <a:off x="777240" y="5760720"/>
+            <a:ext cx="10625328" cy="365760"/>
+          </a:xfrm>
+          <a:prstGeom prst="rect">
+            <a:avLst/>
+          </a:prstGeom>
+          <a:noFill/>
+        </p:spPr>
+        <p:txBody>
+          <a:bodyPr wrap="square" anchor="t" lIns="0" rIns="0" tIns="0" bIns="0">
+            <a:spAutoFit/>
+          </a:bodyPr>
+          <a:lstStyle/>
+          <a:p>
+            <a:pPr algn="l">
+              <a:lnSpc>
+                <a:spcPct val="110000"/>
+              </a:lnSpc>
+              <a:spcBef>
+                <a:spcPts val="0"/>
+              </a:spcBef>
+              <a:spcAft>
+                <a:spcPts val="0"/>
+              </a:spcAft>
+            </a:pPr>
+            <a:r>
+              <a:rPr sz="1100" b="0" i="0">
+                <a:solidFill>
+                  <a:srgbClr val="C9A961"/>
+                </a:solidFill>
+                <a:latin typeface="Inter"/>
+              </a:rPr>
+              <a:t>■ </a:t>
+            </a:r>
+            <a:r>
+              <a:rPr sz="1100" b="0" i="0">
+                <a:solidFill>
+                  <a:srgbClr val="94A3B8"/>
+                </a:solidFill>
+                <a:latin typeface="Inter"/>
+              </a:rPr>
+              <a:t>33 caught by both     </a:t>
+            </a:r>
+            <a:r>
+              <a:rPr sz="1100" b="0" i="0">
+                <a:solidFill>
+                  <a:srgbClr val="F85149"/>
+                </a:solidFill>
+                <a:latin typeface="Inter"/>
+              </a:rPr>
+              <a:t>■ </a:t>
+            </a:r>
+            <a:r>
+              <a:rPr sz="1100" b="0" i="0">
+                <a:solidFill>
+                  <a:srgbClr val="F0F4F8"/>
+                </a:solidFill>
+                <a:latin typeface="Inter"/>
+              </a:rPr>
+              <a:t>4 hidden behind ownership — invisible to any name-screen     </a:t>
+            </a:r>
+            <a:r>
+              <a:rPr sz="1100" b="0" i="0">
+                <a:solidFill>
+                  <a:srgbClr val="DB6D28"/>
+                </a:solidFill>
+                <a:latin typeface="Inter"/>
+              </a:rPr>
+              <a:t>■ </a:t>
+            </a:r>
+            <a:r>
+              <a:rPr sz="1100" b="0" i="0">
+                <a:solidFill>
+                  <a:srgbClr val="94A3B8"/>
+                </a:solidFill>
+                <a:latin typeface="Inter"/>
+              </a:rPr>
+              <a:t>3 lost to name variation</a:t>
+            </a:r>
+          </a:p>
+        </p:txBody>
+      </p:sp>
+      <p:sp>
+        <p:nvSpPr>
+          <p:cNvPr id="33" name="Rounded Rectangle 32"/>
+          <p:cNvSpPr/>
+          <p:nvPr/>
+        </p:nvSpPr>
+        <p:spPr>
+          <a:xfrm>
+            <a:off x="777240" y="6053328"/>
+            <a:ext cx="10625328" cy="530352"/>
           </a:xfrm>
           <a:prstGeom prst="roundRect">
             <a:avLst>
-              <a:gd name="adj" fmla="val 6000"/>
+              <a:gd name="adj" fmla="val 5500"/>
             </a:avLst>
           </a:prstGeom>
           <a:solidFill>
@@ -12163,14 +13649,14 @@
       </p:sp>
       <p:sp>
         <p:nvSpPr>
-          <p:cNvPr id="15" name="TextBox 14"/>
+          <p:cNvPr id="34" name="TextBox 33"/>
           <p:cNvSpPr txBox="1"/>
           <p:nvPr/>
         </p:nvSpPr>
         <p:spPr>
           <a:xfrm>
-            <a:off x="1005840" y="6053328"/>
-            <a:ext cx="10149840" cy="411480"/>
+            <a:off x="1005840" y="6126480"/>
+            <a:ext cx="10149840" cy="384048"/>
           </a:xfrm>
           <a:prstGeom prst="rect">
             <a:avLst/>
@@ -12195,16 +13681,16 @@
               </a:spcAft>
             </a:pPr>
             <a:r>
-              <a:rPr sz="1100" b="0" i="0">
+              <a:rPr sz="1050" b="0" i="0">
                 <a:solidFill>
                   <a:srgbClr val="C9A961"/>
                 </a:solidFill>
                 <a:latin typeface="JetBrains Mono"/>
               </a:rPr>
-              <a:t>13,000+ lines  ·  </a:t>
-            </a:r>
-            <a:r>
-              <a:rPr sz="1100" b="0" i="0">
+              <a:t>~13,000 lines  ·  </a:t>
+            </a:r>
+            <a:r>
+              <a:rPr sz="1050" b="0" i="0">
                 <a:solidFill>
                   <a:srgbClr val="94A3B8"/>
                 </a:solidFill>
@@ -12213,13 +13699,13 @@
               <a:t>Python (FastAPI) + React (Babel-standalone)  ·  Production architecture from day one  ·  </a:t>
             </a:r>
             <a:r>
-              <a:rPr sz="1100" b="0" i="0">
+              <a:rPr sz="1050" b="0" i="0">
                 <a:solidFill>
                   <a:srgbClr val="F0F4F8"/>
                 </a:solidFill>
                 <a:latin typeface="JetBrains Mono"/>
               </a:rPr>
-              <a:t>docker compose up  →  localhost:8000/ui/</a:t>
+              <a:t>docker compose up</a:t>
             </a:r>
           </a:p>
         </p:txBody>
@@ -12258,8 +13744,8 @@
         </p:nvSpPr>
         <p:spPr>
           <a:xfrm>
-            <a:off x="777240" y="2148840"/>
-            <a:ext cx="10607040" cy="914400"/>
+            <a:off x="777240" y="1371600"/>
+            <a:ext cx="10607040" cy="822960"/>
           </a:xfrm>
           <a:prstGeom prst="rect">
             <a:avLst/>
@@ -12280,7 +13766,7 @@
                 <a:spcPts val="0"/>
               </a:spcBef>
               <a:spcAft>
-                <a:spcPts val="1000"/>
+                <a:spcPts val="0"/>
               </a:spcAft>
             </a:pPr>
             <a:r>
@@ -12303,8 +13789,8 @@
         </p:nvSpPr>
         <p:spPr>
           <a:xfrm>
-            <a:off x="777240" y="3200400"/>
-            <a:ext cx="10607040" cy="548640"/>
+            <a:off x="777240" y="2286000"/>
+            <a:ext cx="10607040" cy="457200"/>
           </a:xfrm>
           <a:prstGeom prst="rect">
             <a:avLst/>
@@ -12329,13 +13815,13 @@
               </a:spcAft>
             </a:pPr>
             <a:r>
-              <a:rPr sz="1800" b="0" i="0">
+              <a:rPr sz="1700" b="0" i="0">
                 <a:solidFill>
                   <a:srgbClr val="F0F4F8"/>
                 </a:solidFill>
                 <a:latin typeface="JetBrains Mono"/>
               </a:rPr>
-              <a:t>localhost:8000/ui/      ·      docker compose up</a:t>
+              <a:t>localhost:8000/ui/        ·        docker compose up</a:t>
             </a:r>
           </a:p>
         </p:txBody>
@@ -12348,12 +13834,12 @@
         </p:nvSpPr>
         <p:spPr>
           <a:xfrm>
-            <a:off x="2651760" y="4160520"/>
-            <a:ext cx="6858000" cy="2286000"/>
+            <a:off x="2331720" y="3154680"/>
+            <a:ext cx="7498079" cy="3063240"/>
           </a:xfrm>
           <a:prstGeom prst="roundRect">
             <a:avLst>
-              <a:gd name="adj" fmla="val 6000"/>
+              <a:gd name="adj" fmla="val 5500"/>
             </a:avLst>
           </a:prstGeom>
           <a:solidFill>
@@ -12396,8 +13882,8 @@
         </p:nvSpPr>
         <p:spPr>
           <a:xfrm>
-            <a:off x="2971800" y="4370832"/>
-            <a:ext cx="6309360" cy="1920240"/>
+            <a:off x="2697480" y="3401568"/>
+            <a:ext cx="6858000" cy="2651760"/>
           </a:xfrm>
           <a:prstGeom prst="rect">
             <a:avLst/>
@@ -12418,197 +13904,197 @@
                 <a:spcPts val="0"/>
               </a:spcBef>
               <a:spcAft>
+                <a:spcPts val="1000"/>
+              </a:spcAft>
+            </a:pPr>
+            <a:r>
+              <a:rPr sz="1050" b="1" i="0" spc="200">
+                <a:solidFill>
+                  <a:srgbClr val="C9A961"/>
+                </a:solidFill>
+                <a:latin typeface="Inter"/>
+              </a:rPr>
+              <a:t>DEMO PATH</a:t>
+            </a:r>
+          </a:p>
+          <a:p>
+            <a:pPr algn="l">
+              <a:lnSpc>
+                <a:spcPct val="112000"/>
+              </a:lnSpc>
+              <a:spcBef>
+                <a:spcPts val="0"/>
+              </a:spcBef>
+              <a:spcAft>
                 <a:spcPts val="800"/>
               </a:spcAft>
             </a:pPr>
             <a:r>
-              <a:rPr sz="1050" b="1" i="0" spc="200">
+              <a:rPr sz="1150" b="0" i="0">
                 <a:solidFill>
                   <a:srgbClr val="C9A961"/>
                 </a:solidFill>
-                <a:latin typeface="Inter"/>
-              </a:rPr>
-              <a:t>DEMO PATH</a:t>
-            </a:r>
-          </a:p>
-          <a:p>
-            <a:pPr algn="l">
-              <a:lnSpc>
-                <a:spcPct val="110000"/>
-              </a:lnSpc>
-              <a:spcBef>
-                <a:spcPts val="0"/>
-              </a:spcBef>
-              <a:spcAft>
-                <a:spcPts val="500"/>
-              </a:spcAft>
-            </a:pPr>
-            <a:r>
-              <a:rPr sz="1100" b="0" i="0">
+                <a:latin typeface="JetBrains Mono"/>
+              </a:rPr>
+              <a:t>1.  </a:t>
+            </a:r>
+            <a:r>
+              <a:rPr sz="1150" b="0" i="0">
+                <a:solidFill>
+                  <a:srgbClr val="94A3B8"/>
+                </a:solidFill>
+                <a:latin typeface="Inter"/>
+              </a:rPr>
+              <a:t>Investigations dashboard → open “Q1 2026 Vendor Onboarding”</a:t>
+            </a:r>
+          </a:p>
+          <a:p>
+            <a:pPr algn="l">
+              <a:lnSpc>
+                <a:spcPct val="112000"/>
+              </a:lnSpc>
+              <a:spcBef>
+                <a:spcPts val="0"/>
+              </a:spcBef>
+              <a:spcAft>
+                <a:spcPts val="800"/>
+              </a:spcAft>
+            </a:pPr>
+            <a:r>
+              <a:rPr sz="1150" b="0" i="0">
                 <a:solidFill>
                   <a:srgbClr val="C9A961"/>
                 </a:solidFill>
                 <a:latin typeface="JetBrains Mono"/>
               </a:rPr>
-              <a:t>1.  </a:t>
-            </a:r>
-            <a:r>
-              <a:rPr sz="1100" b="0" i="0">
+              <a:t>2.  </a:t>
+            </a:r>
+            <a:r>
+              <a:rPr sz="1150" b="0" i="0">
                 <a:solidFill>
                   <a:srgbClr val="94A3B8"/>
                 </a:solidFill>
                 <a:latin typeface="Inter"/>
               </a:rPr>
-              <a:t>Investigations dashboard → open “Q1 2026 Vendor Onboarding”</a:t>
-            </a:r>
-          </a:p>
-          <a:p>
-            <a:pPr algn="l">
-              <a:lnSpc>
-                <a:spcPct val="110000"/>
-              </a:lnSpc>
-              <a:spcBef>
-                <a:spcPts val="0"/>
-              </a:spcBef>
-              <a:spcAft>
-                <a:spcPts val="500"/>
-              </a:spcAft>
-            </a:pPr>
-            <a:r>
-              <a:rPr sz="1100" b="0" i="0">
+              <a:t>Compare → Run Composition (50 → 49 → 45 → 40), then the funnel</a:t>
+            </a:r>
+          </a:p>
+          <a:p>
+            <a:pPr algn="l">
+              <a:lnSpc>
+                <a:spcPct val="112000"/>
+              </a:lnSpc>
+              <a:spcBef>
+                <a:spcPts val="0"/>
+              </a:spcBef>
+              <a:spcAft>
+                <a:spcPts val="800"/>
+              </a:spcAft>
+            </a:pPr>
+            <a:r>
+              <a:rPr sz="1150" b="0" i="0">
                 <a:solidFill>
                   <a:srgbClr val="C9A961"/>
                 </a:solidFill>
                 <a:latin typeface="JetBrains Mono"/>
               </a:rPr>
-              <a:t>2.  </a:t>
-            </a:r>
-            <a:r>
-              <a:rPr sz="1100" b="0" i="0">
+              <a:t>3.  </a:t>
+            </a:r>
+            <a:r>
+              <a:rPr sz="1150" b="0" i="0">
                 <a:solidFill>
                   <a:srgbClr val="94A3B8"/>
                 </a:solidFill>
                 <a:latin typeface="Inter"/>
               </a:rPr>
-              <a:t>Compare → Run Composition (50 → 49 → 45 → 40), then the funnel</a:t>
-            </a:r>
-          </a:p>
-          <a:p>
-            <a:pPr algn="l">
-              <a:lnSpc>
-                <a:spcPct val="110000"/>
-              </a:lnSpc>
-              <a:spcBef>
-                <a:spcPts val="0"/>
-              </a:spcBef>
-              <a:spcAft>
-                <a:spcPts val="500"/>
-              </a:spcAft>
-            </a:pPr>
-            <a:r>
-              <a:rPr sz="1100" b="0" i="0">
+              <a:t>Ownership-gap spotlight → click MiG Corporation</a:t>
+            </a:r>
+          </a:p>
+          <a:p>
+            <a:pPr algn="l">
+              <a:lnSpc>
+                <a:spcPct val="112000"/>
+              </a:lnSpc>
+              <a:spcBef>
+                <a:spcPts val="0"/>
+              </a:spcBef>
+              <a:spcAft>
+                <a:spcPts val="800"/>
+              </a:spcAft>
+            </a:pPr>
+            <a:r>
+              <a:rPr sz="1150" b="0" i="0">
                 <a:solidFill>
                   <a:srgbClr val="C9A961"/>
                 </a:solidFill>
                 <a:latin typeface="JetBrains Mono"/>
               </a:rPr>
-              <a:t>3.  </a:t>
-            </a:r>
-            <a:r>
-              <a:rPr sz="1100" b="0" i="0">
+              <a:t>4.  </a:t>
+            </a:r>
+            <a:r>
+              <a:rPr sz="1150" b="0" i="0">
                 <a:solidFill>
                   <a:srgbClr val="94A3B8"/>
                 </a:solidFill>
                 <a:latin typeface="Inter"/>
               </a:rPr>
-              <a:t>Ownership-gap spotlight → click MiG Corporation</a:t>
-            </a:r>
-          </a:p>
-          <a:p>
-            <a:pPr algn="l">
-              <a:lnSpc>
-                <a:spcPct val="110000"/>
-              </a:lnSpc>
-              <a:spcBef>
-                <a:spcPts val="0"/>
-              </a:spcBef>
-              <a:spcAft>
-                <a:spcPts val="500"/>
-              </a:spcAft>
-            </a:pPr>
-            <a:r>
-              <a:rPr sz="1100" b="0" i="0">
+              <a:t>Entity detail → ownership graph → traverse to United Aircraft (SDN)</a:t>
+            </a:r>
+          </a:p>
+          <a:p>
+            <a:pPr algn="l">
+              <a:lnSpc>
+                <a:spcPct val="112000"/>
+              </a:lnSpc>
+              <a:spcBef>
+                <a:spcPts val="0"/>
+              </a:spcBef>
+              <a:spcAft>
+                <a:spcPts val="800"/>
+              </a:spcAft>
+            </a:pPr>
+            <a:r>
+              <a:rPr sz="1150" b="0" i="0">
                 <a:solidFill>
                   <a:srgbClr val="C9A961"/>
                 </a:solidFill>
                 <a:latin typeface="JetBrains Mono"/>
               </a:rPr>
-              <a:t>4.  </a:t>
-            </a:r>
-            <a:r>
-              <a:rPr sz="1100" b="0" i="0">
+              <a:t>5.  </a:t>
+            </a:r>
+            <a:r>
+              <a:rPr sz="1150" b="0" i="0">
                 <a:solidFill>
                   <a:srgbClr val="94A3B8"/>
                 </a:solidFill>
                 <a:latin typeface="Inter"/>
               </a:rPr>
-              <a:t>Entity detail → ownership graph → traverse to United Aircraft (SDN)</a:t>
-            </a:r>
-          </a:p>
-          <a:p>
-            <a:pPr algn="l">
-              <a:lnSpc>
-                <a:spcPct val="110000"/>
-              </a:lnSpc>
-              <a:spcBef>
-                <a:spcPts val="0"/>
-              </a:spcBef>
-              <a:spcAft>
-                <a:spcPts val="500"/>
-              </a:spcAft>
-            </a:pPr>
-            <a:r>
-              <a:rPr sz="1100" b="0" i="0">
+              <a:t>Co-Pilot → grounded answer with cited tool calls (cached)</a:t>
+            </a:r>
+          </a:p>
+          <a:p>
+            <a:pPr algn="l">
+              <a:lnSpc>
+                <a:spcPct val="112000"/>
+              </a:lnSpc>
+              <a:spcBef>
+                <a:spcPts val="0"/>
+              </a:spcBef>
+              <a:spcAft>
+                <a:spcPts val="800"/>
+              </a:spcAft>
+            </a:pPr>
+            <a:r>
+              <a:rPr sz="1150" b="0" i="0">
                 <a:solidFill>
                   <a:srgbClr val="C9A961"/>
                 </a:solidFill>
                 <a:latin typeface="JetBrains Mono"/>
               </a:rPr>
-              <a:t>5.  </a:t>
-            </a:r>
-            <a:r>
-              <a:rPr sz="1100" b="0" i="0">
-                <a:solidFill>
-                  <a:srgbClr val="94A3B8"/>
-                </a:solidFill>
-                <a:latin typeface="Inter"/>
-              </a:rPr>
-              <a:t>Co-Pilot → grounded answer with cited tool calls (cached)</a:t>
-            </a:r>
-          </a:p>
-          <a:p>
-            <a:pPr algn="l">
-              <a:lnSpc>
-                <a:spcPct val="110000"/>
-              </a:lnSpc>
-              <a:spcBef>
-                <a:spcPts val="0"/>
-              </a:spcBef>
-              <a:spcAft>
-                <a:spcPts val="500"/>
-              </a:spcAft>
-            </a:pPr>
-            <a:r>
-              <a:rPr sz="1100" b="0" i="0">
-                <a:solidFill>
-                  <a:srgbClr val="C9A961"/>
-                </a:solidFill>
-                <a:latin typeface="JetBrains Mono"/>
-              </a:rPr>
               <a:t>6.  </a:t>
             </a:r>
             <a:r>
-              <a:rPr sz="1100" b="0" i="0">
+              <a:rPr sz="1150" b="0" i="0">
                 <a:solidFill>
                   <a:srgbClr val="94A3B8"/>
                 </a:solidFill>
@@ -12748,7 +14234,7 @@
           </a:xfrm>
           <a:prstGeom prst="roundRect">
             <a:avLst>
-              <a:gd name="adj" fmla="val 6000"/>
+              <a:gd name="adj" fmla="val 5500"/>
             </a:avLst>
           </a:prstGeom>
           <a:solidFill>
@@ -12908,7 +14394,7 @@
           </a:xfrm>
           <a:prstGeom prst="roundRect">
             <a:avLst>
-              <a:gd name="adj" fmla="val 6000"/>
+              <a:gd name="adj" fmla="val 5500"/>
             </a:avLst>
           </a:prstGeom>
           <a:solidFill>
@@ -13005,7 +14491,7 @@
                 </a:solidFill>
                 <a:latin typeface="JetBrains Mono"/>
               </a:rPr>
-              <a:t>tools API  ·  SSE streams  ·  OFAC matcher  ·  agent loop  ·  in-memory credential store</a:t>
+              <a:t>tools API · SSE streams · OFAC matcher · agent loop · in-memory credential store</a:t>
             </a:r>
           </a:p>
         </p:txBody>
@@ -13068,7 +14554,7 @@
           </a:xfrm>
           <a:prstGeom prst="roundRect">
             <a:avLst>
-              <a:gd name="adj" fmla="val 6000"/>
+              <a:gd name="adj" fmla="val 5500"/>
             </a:avLst>
           </a:prstGeom>
           <a:solidFill>
@@ -13165,7 +14651,7 @@
                 </a:solidFill>
                 <a:latin typeface="JetBrains Mono"/>
               </a:rPr>
-              <a:t>packages/engine/  ·  resolve · profile · cache · OFAC</a:t>
+              <a:t>packages/engine/ · resolve · profile · cache · OFAC</a:t>
             </a:r>
           </a:p>
         </p:txBody>
@@ -13183,7 +14669,7 @@
           </a:xfrm>
           <a:prstGeom prst="roundRect">
             <a:avLst>
-              <a:gd name="adj" fmla="val 6000"/>
+              <a:gd name="adj" fmla="val 5500"/>
             </a:avLst>
           </a:prstGeom>
           <a:solidFill>
@@ -13280,7 +14766,7 @@
                 </a:solidFill>
                 <a:latin typeface="JetBrains Mono"/>
               </a:rPr>
-              <a:t>services/mcp/  ·  6 tools  ·  direct import</a:t>
+              <a:t>services/mcp/ · 6 tools · direct import</a:t>
             </a:r>
           </a:p>
         </p:txBody>
@@ -13343,7 +14829,7 @@
           </a:xfrm>
           <a:prstGeom prst="roundRect">
             <a:avLst>
-              <a:gd name="adj" fmla="val 6000"/>
+              <a:gd name="adj" fmla="val 5500"/>
             </a:avLst>
           </a:prstGeom>
           <a:solidFill>
@@ -13458,7 +14944,7 @@
           </a:xfrm>
           <a:prstGeom prst="roundRect">
             <a:avLst>
-              <a:gd name="adj" fmla="val 6000"/>
+              <a:gd name="adj" fmla="val 5500"/>
             </a:avLst>
           </a:prstGeom>
           <a:solidFill>
@@ -13573,7 +15059,7 @@
           </a:xfrm>
           <a:prstGeom prst="roundRect">
             <a:avLst>
-              <a:gd name="adj" fmla="val 6000"/>
+              <a:gd name="adj" fmla="val 5500"/>
             </a:avLst>
           </a:prstGeom>
           <a:solidFill>
@@ -13688,7 +15174,7 @@
           </a:xfrm>
           <a:prstGeom prst="roundRect">
             <a:avLst>
-              <a:gd name="adj" fmla="val 6000"/>
+              <a:gd name="adj" fmla="val 5500"/>
             </a:avLst>
           </a:prstGeom>
           <a:solidFill>
@@ -13882,7 +15368,7 @@
                 <a:spcPct val="112000"/>
               </a:lnSpc>
               <a:spcBef>
-                <a:spcPts val="600"/>
+                <a:spcPts val="800"/>
               </a:spcBef>
               <a:spcAft>
                 <a:spcPts val="300"/>
@@ -13979,7 +15465,7 @@
           </a:xfrm>
           <a:prstGeom prst="roundRect">
             <a:avLst>
-              <a:gd name="adj" fmla="val 6000"/>
+              <a:gd name="adj" fmla="val 5500"/>
             </a:avLst>
           </a:prstGeom>
           <a:solidFill>
@@ -14250,7 +15736,7 @@
           </a:xfrm>
           <a:prstGeom prst="roundRect">
             <a:avLst>
-              <a:gd name="adj" fmla="val 6000"/>
+              <a:gd name="adj" fmla="val 5500"/>
             </a:avLst>
           </a:prstGeom>
           <a:solidFill>
@@ -14534,25 +16020,42 @@
           </a:bodyPr>
           <a:lstStyle/>
           <a:p>
-            <a:pPr algn="l">
-              <a:lnSpc>
-                <a:spcPct val="112000"/>
-              </a:lnSpc>
-              <a:spcBef>
-                <a:spcPts val="0"/>
-              </a:spcBef>
-              <a:spcAft>
-                <a:spcPts val="0"/>
-              </a:spcAft>
-            </a:pPr>
-            <a:r>
-              <a:rPr sz="780" b="0" i="0">
+            <a:pPr>
+              <a:lnSpc>
+                <a:spcPct val="105000"/>
+              </a:lnSpc>
+              <a:spcAft>
+                <a:spcPts val="200"/>
+              </a:spcAft>
+            </a:pPr>
+            <a:r>
+              <a:rPr sz="780">
                 <a:solidFill>
                   <a:srgbClr val="8A7440"/>
                 </a:solidFill>
                 <a:latin typeface="JetBrains Mono"/>
-              </a:rPr>
-              <a:t>packages/engine/profile.py:26-118  ·  services/api/agent/runner.py</a:t>
+                <a:hlinkClick r:id="rId2"/>
+              </a:rPr>
+              <a:t>packages/engine/profile.py:26-118</a:t>
+            </a:r>
+            <a:r>
+              <a:rPr sz="780">
+                <a:solidFill>
+                  <a:srgbClr val="64748B"/>
+                </a:solidFill>
+                <a:latin typeface="JetBrains Mono"/>
+              </a:rPr>
+              <a:t>  ·  </a:t>
+            </a:r>
+            <a:r>
+              <a:rPr sz="780">
+                <a:solidFill>
+                  <a:srgbClr val="8A7440"/>
+                </a:solidFill>
+                <a:latin typeface="JetBrains Mono"/>
+                <a:hlinkClick r:id="rId3"/>
+              </a:rPr>
+              <a:t>services/api/agent/runner.py</a:t>
             </a:r>
           </a:p>
         </p:txBody>
@@ -14570,7 +16073,7 @@
           </a:xfrm>
           <a:prstGeom prst="roundRect">
             <a:avLst>
-              <a:gd name="adj" fmla="val 6000"/>
+              <a:gd name="adj" fmla="val 5500"/>
             </a:avLst>
           </a:prstGeom>
           <a:solidFill>
@@ -14854,25 +16357,42 @@
           </a:bodyPr>
           <a:lstStyle/>
           <a:p>
-            <a:pPr algn="l">
-              <a:lnSpc>
-                <a:spcPct val="112000"/>
-              </a:lnSpc>
-              <a:spcBef>
-                <a:spcPts val="0"/>
-              </a:spcBef>
-              <a:spcAft>
-                <a:spcPts val="0"/>
-              </a:spcAft>
-            </a:pPr>
-            <a:r>
-              <a:rPr sz="780" b="0" i="0">
+            <a:pPr>
+              <a:lnSpc>
+                <a:spcPct val="105000"/>
+              </a:lnSpc>
+              <a:spcAft>
+                <a:spcPts val="200"/>
+              </a:spcAft>
+            </a:pPr>
+            <a:r>
+              <a:rPr sz="780">
                 <a:solidFill>
                   <a:srgbClr val="8A7440"/>
                 </a:solidFill>
                 <a:latin typeface="JetBrains Mono"/>
-              </a:rPr>
-              <a:t>services/api/tools/screen_ofac.py:37-98  ·  services/api/ofac/matcher.py</a:t>
+                <a:hlinkClick r:id="rId4"/>
+              </a:rPr>
+              <a:t>services/api/ofac/matcher.py:76-102</a:t>
+            </a:r>
+            <a:r>
+              <a:rPr sz="780">
+                <a:solidFill>
+                  <a:srgbClr val="64748B"/>
+                </a:solidFill>
+                <a:latin typeface="JetBrains Mono"/>
+              </a:rPr>
+              <a:t>  ·  </a:t>
+            </a:r>
+            <a:r>
+              <a:rPr sz="780">
+                <a:solidFill>
+                  <a:srgbClr val="8A7440"/>
+                </a:solidFill>
+                <a:latin typeface="JetBrains Mono"/>
+                <a:hlinkClick r:id="rId5"/>
+              </a:rPr>
+              <a:t>services/api/tools/screen_ofac.py:37-98</a:t>
             </a:r>
           </a:p>
         </p:txBody>
@@ -14890,7 +16410,7 @@
           </a:xfrm>
           <a:prstGeom prst="roundRect">
             <a:avLst>
-              <a:gd name="adj" fmla="val 6000"/>
+              <a:gd name="adj" fmla="val 5500"/>
             </a:avLst>
           </a:prstGeom>
           <a:solidFill>
@@ -15174,23 +16694,21 @@
           </a:bodyPr>
           <a:lstStyle/>
           <a:p>
-            <a:pPr algn="l">
-              <a:lnSpc>
-                <a:spcPct val="112000"/>
-              </a:lnSpc>
-              <a:spcBef>
-                <a:spcPts val="0"/>
-              </a:spcBef>
-              <a:spcAft>
-                <a:spcPts val="0"/>
-              </a:spcAft>
-            </a:pPr>
-            <a:r>
-              <a:rPr sz="780" b="0" i="0">
+            <a:pPr>
+              <a:lnSpc>
+                <a:spcPct val="105000"/>
+              </a:lnSpc>
+              <a:spcAft>
+                <a:spcPts val="200"/>
+              </a:spcAft>
+            </a:pPr>
+            <a:r>
+              <a:rPr sz="780">
                 <a:solidFill>
                   <a:srgbClr val="8A7440"/>
                 </a:solidFill>
                 <a:latin typeface="JetBrains Mono"/>
+                <a:hlinkClick r:id="rId6"/>
               </a:rPr>
               <a:t>packages/engine/resolve.py:15-34</a:t>
             </a:r>
@@ -15370,7 +16888,7 @@
           </a:xfrm>
           <a:prstGeom prst="roundRect">
             <a:avLst>
-              <a:gd name="adj" fmla="val 6000"/>
+              <a:gd name="adj" fmla="val 5500"/>
             </a:avLst>
           </a:prstGeom>
           <a:solidFill>
@@ -15485,7 +17003,7 @@
           </a:xfrm>
           <a:prstGeom prst="roundRect">
             <a:avLst>
-              <a:gd name="adj" fmla="val 6000"/>
+              <a:gd name="adj" fmla="val 5500"/>
             </a:avLst>
           </a:prstGeom>
           <a:solidFill>
@@ -15702,7 +17220,7 @@
           </a:xfrm>
           <a:prstGeom prst="roundRect">
             <a:avLst>
-              <a:gd name="adj" fmla="val 6000"/>
+              <a:gd name="adj" fmla="val 5500"/>
             </a:avLst>
           </a:prstGeom>
           <a:solidFill>
@@ -16120,11 +17638,11 @@
         <p:spPr>
           <a:xfrm>
             <a:off x="777240" y="1938528"/>
-            <a:ext cx="5184648" cy="4434840"/>
+            <a:ext cx="5184648" cy="4160520"/>
           </a:xfrm>
           <a:prstGeom prst="roundRect">
             <a:avLst>
-              <a:gd name="adj" fmla="val 6000"/>
+              <a:gd name="adj" fmla="val 5500"/>
             </a:avLst>
           </a:prstGeom>
           <a:solidFill>
@@ -16168,7 +17686,7 @@
         <p:spPr>
           <a:xfrm>
             <a:off x="1005840" y="2121408"/>
-            <a:ext cx="4754880" cy="4114800"/>
+            <a:ext cx="4754880" cy="3840480"/>
           </a:xfrm>
           <a:prstGeom prst="rect">
             <a:avLst/>
@@ -16193,13 +17711,13 @@
               </a:spcAft>
             </a:pPr>
             <a:r>
-              <a:rPr sz="1000" b="1" i="0" spc="140">
+              <a:rPr sz="1000" b="1" i="0" spc="120">
                 <a:solidFill>
                   <a:srgbClr val="C9A961"/>
                 </a:solidFill>
                 <a:latin typeface="Inter"/>
               </a:rPr>
-              <a:t>DELIBERATELY DEFERRED  ·  8-DAY SCOPE</a:t>
+              <a:t>DELIBERATELY DEFERRED  ·  TAKE-HOME SCOPE</a:t>
             </a:r>
           </a:p>
           <a:p>
@@ -16433,11 +17951,11 @@
         <p:spPr>
           <a:xfrm>
             <a:off x="6217920" y="1938528"/>
-            <a:ext cx="5184648" cy="4434840"/>
+            <a:ext cx="5184648" cy="4160520"/>
           </a:xfrm>
           <a:prstGeom prst="roundRect">
             <a:avLst>
-              <a:gd name="adj" fmla="val 6000"/>
+              <a:gd name="adj" fmla="val 5500"/>
             </a:avLst>
           </a:prstGeom>
           <a:solidFill>
@@ -16481,7 +17999,7 @@
         <p:spPr>
           <a:xfrm>
             <a:off x="6446520" y="2121408"/>
-            <a:ext cx="4754880" cy="4114800"/>
+            <a:ext cx="4754880" cy="3840480"/>
           </a:xfrm>
           <a:prstGeom prst="rect">
             <a:avLst/>
@@ -16506,7 +18024,7 @@
               </a:spcAft>
             </a:pPr>
             <a:r>
-              <a:rPr sz="1000" b="1" i="0" spc="140">
+              <a:rPr sz="1000" b="1" i="0" spc="120">
                 <a:solidFill>
                   <a:srgbClr val="C9A961"/>
                 </a:solidFill>
@@ -16907,11 +18425,11 @@
         <p:spPr>
           <a:xfrm>
             <a:off x="777240" y="1938528"/>
-            <a:ext cx="5184648" cy="1874519"/>
+            <a:ext cx="5184648" cy="1783080"/>
           </a:xfrm>
           <a:prstGeom prst="roundRect">
             <a:avLst>
-              <a:gd name="adj" fmla="val 6000"/>
+              <a:gd name="adj" fmla="val 5500"/>
             </a:avLst>
           </a:prstGeom>
           <a:solidFill>
@@ -16955,7 +18473,7 @@
         <p:spPr>
           <a:xfrm>
             <a:off x="987552" y="2103120"/>
-            <a:ext cx="4800600" cy="1554480"/>
+            <a:ext cx="4800600" cy="1463040"/>
           </a:xfrm>
           <a:prstGeom prst="rect">
             <a:avLst/>
@@ -17110,11 +18628,11 @@
         <p:spPr>
           <a:xfrm>
             <a:off x="6217920" y="1938528"/>
-            <a:ext cx="5184648" cy="1874519"/>
+            <a:ext cx="5184648" cy="1783080"/>
           </a:xfrm>
           <a:prstGeom prst="roundRect">
             <a:avLst>
-              <a:gd name="adj" fmla="val 6000"/>
+              <a:gd name="adj" fmla="val 5500"/>
             </a:avLst>
           </a:prstGeom>
           <a:solidFill>
@@ -17158,7 +18676,7 @@
         <p:spPr>
           <a:xfrm>
             <a:off x="6428232" y="2103120"/>
-            <a:ext cx="4800600" cy="1554480"/>
+            <a:ext cx="4800600" cy="1463040"/>
           </a:xfrm>
           <a:prstGeom prst="rect">
             <a:avLst/>
@@ -17246,12 +18764,12 @@
         </p:nvSpPr>
         <p:spPr>
           <a:xfrm>
-            <a:off x="777240" y="3968496"/>
-            <a:ext cx="10625328" cy="1874519"/>
+            <a:off x="777240" y="3877056"/>
+            <a:ext cx="10625328" cy="1783080"/>
           </a:xfrm>
           <a:prstGeom prst="roundRect">
             <a:avLst>
-              <a:gd name="adj" fmla="val 6000"/>
+              <a:gd name="adj" fmla="val 5500"/>
             </a:avLst>
           </a:prstGeom>
           <a:solidFill>
@@ -17294,8 +18812,8 @@
         </p:nvSpPr>
         <p:spPr>
           <a:xfrm>
-            <a:off x="1005840" y="4133087"/>
-            <a:ext cx="10149840" cy="1554480"/>
+            <a:off x="1005840" y="4041648"/>
+            <a:ext cx="10149840" cy="1463040"/>
           </a:xfrm>
           <a:prstGeom prst="rect">
             <a:avLst/>
@@ -17432,8 +18950,8 @@
         </p:nvSpPr>
         <p:spPr>
           <a:xfrm>
-            <a:off x="777240" y="5989320"/>
-            <a:ext cx="10625328" cy="502920"/>
+            <a:off x="777240" y="5852160"/>
+            <a:ext cx="10625328" cy="457200"/>
           </a:xfrm>
           <a:prstGeom prst="rect">
             <a:avLst/>
@@ -17446,25 +18964,61 @@
           </a:bodyPr>
           <a:lstStyle/>
           <a:p>
-            <a:pPr algn="l">
+            <a:pPr>
               <a:lnSpc>
                 <a:spcPct val="105000"/>
               </a:lnSpc>
-              <a:spcBef>
-                <a:spcPts val="0"/>
-              </a:spcBef>
               <a:spcAft>
                 <a:spcPts val="200"/>
               </a:spcAft>
             </a:pPr>
             <a:r>
-              <a:rPr sz="850" b="0" i="0">
+              <a:rPr sz="840">
                 <a:solidFill>
                   <a:srgbClr val="8A7440"/>
                 </a:solidFill>
                 <a:latin typeface="JetBrains Mono"/>
-              </a:rPr>
-              <a:t>services/api/tools/compare_ofac_vs_sayari.py  ·  services/api/routers/uploads.py:550-610  ·  design-prototype/surfaces/upload.jsx</a:t>
+                <a:hlinkClick r:id="rId2"/>
+              </a:rPr>
+              <a:t>services/api/tools/compare_ofac_vs_sayari.py</a:t>
+            </a:r>
+            <a:r>
+              <a:rPr sz="840">
+                <a:solidFill>
+                  <a:srgbClr val="64748B"/>
+                </a:solidFill>
+                <a:latin typeface="JetBrains Mono"/>
+              </a:rPr>
+              <a:t>  ·  </a:t>
+            </a:r>
+            <a:r>
+              <a:rPr sz="840">
+                <a:solidFill>
+                  <a:srgbClr val="8A7440"/>
+                </a:solidFill>
+                <a:latin typeface="JetBrains Mono"/>
+                <a:hlinkClick r:id="rId3"/>
+              </a:rPr>
+              <a:t>services/api/routers/uploads.py:550-610</a:t>
+            </a:r>
+            <a:r>
+              <a:rPr sz="840">
+                <a:solidFill>
+                  <a:srgbClr val="64748B"/>
+                </a:solidFill>
+                <a:latin typeface="JetBrains Mono"/>
+              </a:rPr>
+              <a:t>  ·  </a:t>
+            </a:r>
+            <a:r>
+              <a:rPr sz="840">
+                <a:solidFill>
+                  <a:srgbClr val="8A7440"/>
+                </a:solidFill>
+                <a:latin typeface="JetBrains Mono"/>
+                <a:hlinkClick r:id="rId4"/>
+              </a:rPr>
+              <a:t>design-prototype/surfaces/upload.jsx</a:t>
             </a:r>
           </a:p>
         </p:txBody>
@@ -17512,10 +19066,10 @@
         <a:srgbClr val="F79646"/>
       </a:accent6>
       <a:hlink>
-        <a:srgbClr val="0000FF"/>
+        <a:srgbClr val="8A7440"/>
       </a:hlink>
       <a:folHlink>
-        <a:srgbClr val="800080"/>
+        <a:srgbClr val="8A7440"/>
       </a:folHlink>
     </a:clrScheme>
     <a:fontScheme name="Office">
@@ -17832,10 +19386,10 @@
         <a:srgbClr val="F79646"/>
       </a:accent6>
       <a:hlink>
-        <a:srgbClr val="0000FF"/>
+        <a:srgbClr val="8A7440"/>
       </a:hlink>
       <a:folHlink>
-        <a:srgbClr val="800080"/>
+        <a:srgbClr val="8A7440"/>
       </a:folHlink>
     </a:clrScheme>
     <a:fontScheme name="Office">
